--- a/kits/kit06/Kit06_PresentationDeck.pptx
+++ b/kits/kit06/Kit06_PresentationDeck.pptx
@@ -707,7 +707,7 @@
           <a:p>
             <a:r>
               <a:rPr lang="en-US" dirty="0"/>
-              <a:t>Say: this is Kraft &amp; Rogers turned into five minutes a week: improvement-focused, individualized, personalized by you. The personalizing step is not optional; it's the mechanism.</a:t>
+              <a:t>Say: this is Kraft &amp; Rogers turned into five minutes a week: improvement-focused, individualized, personalized by you. The personalizing step is not optional; it's the mechanism. The lab takes one message start to finish, so the batch is homework: the prompt is on the handout, and it's Send 2 on the First 48 Hours sheet.</a:t>
             </a:r>
             <a:endParaRPr lang="en-US" dirty="0"/>
           </a:p>
@@ -795,7 +795,7 @@
           <a:p>
             <a:r>
               <a:rPr lang="en-US" dirty="0"/>
-              <a:t>Let the room call each problem before you confirm with the right column. 45-min cut: rows 1 and 3 only.</a:t>
+              <a:t>Say: when a message home goes wrong, it's usually because the prompt skipped part of Kit 2's formula (Role, Task, Context, Format), so diagnose WHICH part. Let the room name the missing part before you confirm with the right column. The fix is never mysterious: hand the prompt the part it skipped and run it again. 45-min cut: rows 1 and 3 only.</a:t>
             </a:r>
             <a:endParaRPr lang="en-US" dirty="0"/>
           </a:p>
@@ -883,7 +883,7 @@
           <a:p>
             <a:r>
               <a:rPr lang="en-US" dirty="0"/>
-              <a:t>Both verified: NCES Condition of Education (fall 2021 data); ED/DOJ 2015 Dear Colleague Letter (Title VI). Frame as obligation AND opportunity: the one-sentence research from slide 3 applies to every family.</a:t>
+              <a:t>Say: three commands, one test, one rule; that's the whole kit, and the next slide puts it to work. Expect real feeling on the 24-hour rule; someone in the room has sent the email they regret. Give it a beat.</a:t>
             </a:r>
             <a:endParaRPr lang="en-US" dirty="0"/>
           </a:p>
@@ -971,7 +971,7 @@
           <a:p>
             <a:r>
               <a:rPr lang="en-US" dirty="0"/>
-              <a:t>Name your district's translation office/channel here if you know it. Never trim this slide. If asked "is AI translation good enough?": for routine messages with these rules, it beats sending nothing a family can read; official documents always go district.</a:t>
+              <a:t>Say: three real drafts, one command each; call it out. Read each draft, let the room call warmer / shorter / plainer, then read the repaired line from the right column. 45-min cut: draft A only.</a:t>
             </a:r>
             <a:endParaRPr lang="en-US" dirty="0"/>
           </a:p>
@@ -1059,7 +1059,7 @@
           <a:p>
             <a:r>
               <a:rPr lang="en-US" dirty="0"/>
-              <a:t>Expect real feeling on the 24-hour rule; someone in the room has sent the email they regret. Give it a beat.</a:t>
+              <a:t>Say: one red line before the lab, and it's short. We do not use public AI tools to translate messages to families: you cannot review what you cannot read, and nothing goes home with your name on it unreviewed. Official and legal documents already have a lane, the district's translation channels. Your job is the plain-language original; that's the version every family can use and the version district translators do their best work from. Never trim this slide.</a:t>
             </a:r>
             <a:endParaRPr lang="en-US" dirty="0"/>
           </a:p>
@@ -1323,7 +1323,7 @@
           <a:p>
             <a:r>
               <a:rPr lang="en-US" dirty="0"/>
-              <a:t>Dark slide. Pairs formed inside two minutes; announce the tool. Everything built today actually sends this week.</a:t>
+              <a:t>Say: eighteen minutes, one deliverable, completely real: the message you owe families this week, drafted, voiced, the hard part repaired, action items on top, scheduled. Dark slide. Pairs formed inside two minutes; announce the tool.</a:t>
             </a:r>
             <a:endParaRPr lang="en-US" dirty="0"/>
           </a:p>
@@ -1411,7 +1411,7 @@
           <a:p>
             <a:r>
               <a:rPr lang="en-US" dirty="0"/>
-              <a:t>6 minutes. Circulate. Weak drafts lack context; nudge with "what does a family actually need to know and do this week?"</a:t>
+              <a:t>Say: draft the message you actually owe families, all four parts, generous context. On screen, Ms. Rivera's first draft: notice it's close and notice it isn't her yet, and the one thing families must act on sits in the last line. That's normal for a first draft. 6 minutes (45-min cut: 5). Circulate; weak drafts lack context.</a:t>
             </a:r>
             <a:endParaRPr lang="en-US" dirty="0"/>
           </a:p>
@@ -1587,7 +1587,7 @@
           <a:p>
             <a:r>
               <a:rPr lang="en-US" dirty="0"/>
-              <a:t>5 minutes. Pairs read ALOUD; the partner's ear is the voice test. Done means send-ready.</a:t>
+              <a:t>Say: read it aloud to your partner; every sentence your mouth wouldn't say gets retyped the way you'd say it. On screen, the same newsletter, v2: it sounds like her now, and one thing is still wrong. 4 minutes. 45-min cut: fold step 4 in here (one read-aloud fixes voice and order together).</a:t>
             </a:r>
             <a:endParaRPr lang="en-US" dirty="0"/>
           </a:p>
@@ -1675,7 +1675,7 @@
           <a:p>
             <a:r>
               <a:rPr lang="en-US" dirty="0"/>
-              <a:t>5 minutes. 45-min cut: skip; the batch moves to the First 48 Hours sheet. The prompt is on the handout.</a:t>
+              <a:t>Say: find the sentence you've been avoiding and rewrite it warm, plain, and guilt-free, ending with what to do and by when. Ms. Rivera's was the permission-slip line: same requirement, zero sting. If yours came out a little angry, this is where the 24-hour rule gets its workout. 4 minutes; protect this step. Circulate for the sentence people are avoiding.</a:t>
             </a:r>
             <a:endParaRPr lang="en-US" dirty="0"/>
           </a:p>
@@ -1763,7 +1763,7 @@
           <a:p>
             <a:r>
               <a:rPr lang="en-US" dirty="0"/>
-              <a:t>3 minutes, quiet writing; the template is on the handout. Gaps teachers can't close (no liaison, no channel) get routed to leadership in the 30-day plan; that's their job to close.</a:t>
+              <a:t>Say: pull every action item to the top with dates, keep it plain and under about 150 words, then trade one last time: your partner reads it as a tired parent on a phone and flags anything unclear. When it comes back clean, schedule the send right now. 4 minutes. 45-min cut: folded into step 2.</a:t>
             </a:r>
             <a:endParaRPr lang="en-US" dirty="0"/>
           </a:p>
@@ -1851,7 +1851,7 @@
           <a:p>
             <a:r>
               <a:rPr lang="en-US" dirty="0"/>
-              <a:t>3 voices, one minute each. 45-min cut: two voices. The voice diversity IS the lesson; name it.</a:t>
+              <a:t>3 voices, one minute each. 45-min cut: two voices. Same facts on both cards; the after is simply her. The voice diversity IS the lesson; name it.</a:t>
             </a:r>
             <a:endParaRPr lang="en-US" dirty="0"/>
           </a:p>
@@ -1939,7 +1939,7 @@
           <a:p>
             <a:r>
               <a:rPr lang="en-US" dirty="0"/>
-              <a:t>Let the inventory land. Everything on it sends this week; that's what separates this from PD that evaporates.</a:t>
+              <a:t>Let the inventory land. The message on it actually sends this week; that's what separates this from PD that evaporates.</a:t>
             </a:r>
             <a:endParaRPr lang="en-US" dirty="0"/>
           </a:p>
@@ -2027,7 +2027,7 @@
           <a:p>
             <a:r>
               <a:rPr lang="en-US" dirty="0"/>
-              <a:t>The honest-limits slide every kit carries. End on the consistency line.</a:t>
+              <a:t>The honest-limits slide every kit carries. The middle bullet restates the red line as a limit, not a rule. End on the consistency line.</a:t>
             </a:r>
             <a:endParaRPr lang="en-US" dirty="0"/>
           </a:p>
@@ -2203,7 +2203,7 @@
           <a:p>
             <a:r>
               <a:rPr lang="en-US" dirty="0"/>
-              <a:t>All inside existing PLC time. The translation audit routes leadership-level gaps up, where they belong.</a:t>
+              <a:t>All inside existing PLC time. The makeover swap runs on the tone kit: warmer, shorter, plainer, read it aloud.</a:t>
             </a:r>
             <a:endParaRPr lang="en-US" dirty="0"/>
           </a:p>
@@ -3628,7 +3628,7 @@
                 <a:ea typeface="Inter" pitchFamily="34" charset="-122"/>
                 <a:cs typeface="Inter" pitchFamily="34" charset="-120"/>
               </a:rPr>
-              <a:t>Parent Messages, Translation, and Tone</a:t>
+              <a:t>Parent Messages and Tone</a:t>
             </a:r>
             <a:endParaRPr lang="en-US" sz="4000" dirty="0"/>
           </a:p>
@@ -5632,7 +5632,7 @@
                 <a:ea typeface="Inter" pitchFamily="34" charset="-122"/>
                 <a:cs typeface="Inter" pitchFamily="34" charset="-120"/>
               </a:rPr>
-              <a:t>Her diagnosis eye: no audience, no action item, buried lede. Now she can fix all three.</a:t>
+              <a:t>Her diagnosis eye: a bad message is a prompt missing a part. Role, Context, or Format: name it.</a:t>
             </a:r>
             <a:endParaRPr lang="en-US" sz="1000" dirty="0"/>
           </a:p>
@@ -5671,7 +5671,7 @@
                 <a:ea typeface="Inter" pitchFamily="34" charset="-122"/>
                 <a:cs typeface="Inter" pitchFamily="34" charset="-120"/>
               </a:rPr>
-              <a:t>PRACTICE · CALL OUT THE PROBLEM</a:t>
+              <a:t>PRACTICE · WHICH PART OF THE KIT 2 FORMULA DID THE PROMPT SKIP?</a:t>
             </a:r>
             <a:endParaRPr lang="en-US" sz="1200" dirty="0"/>
           </a:p>
@@ -5686,7 +5686,7 @@
         <p:spPr>
           <a:xfrm>
             <a:off x="548640" y="384048"/>
-            <a:ext cx="11091672" cy="777240"/>
+            <a:ext cx="7955280" cy="777240"/>
           </a:xfrm>
           <a:prstGeom prst="rect">
             <a:avLst/>
@@ -5788,7 +5788,7 @@
                 <a:ea typeface="Inter" pitchFamily="34" charset="-122"/>
                 <a:cs typeface="Inter" pitchFamily="34" charset="-120"/>
               </a:rPr>
-              <a:t>A 400-word newsletter; the permission slip is in the last paragraph</a:t>
+              <a:t>A 400-word newsletter; the key request (the permission slip) is buried at the bottom</a:t>
             </a:r>
             <a:endParaRPr lang="en-US" sz="1650" dirty="0"/>
           </a:p>
@@ -5827,7 +5827,7 @@
                 <a:ea typeface="Inter" pitchFamily="34" charset="-122"/>
                 <a:cs typeface="Inter" pitchFamily="34" charset="-120"/>
               </a:rPr>
-              <a:t>Buried lede: the action item leads</a:t>
+              <a:t>Missing FORMAT: never said "action items first, under 150 words"</a:t>
             </a:r>
             <a:endParaRPr lang="en-US" sz="1450" dirty="0"/>
           </a:p>
@@ -5905,7 +5905,7 @@
                 <a:ea typeface="Inter" pitchFamily="34" charset="-122"/>
                 <a:cs typeface="Inter" pitchFamily="34" charset="-120"/>
               </a:rPr>
-              <a:t>"Formative assessment data indicates…" to families</a:t>
+              <a:t>"Formative assessment data indicates…" sent to families</a:t>
             </a:r>
             <a:endParaRPr lang="en-US" sz="1650" dirty="0"/>
           </a:p>
@@ -5944,7 +5944,7 @@
                 <a:ea typeface="Inter" pitchFamily="34" charset="-122"/>
                 <a:cs typeface="Inter" pitchFamily="34" charset="-120"/>
               </a:rPr>
-              <a:t>Audience miss: plain words, phone-skimmable</a:t>
+              <a:t>Missing CONTEXT: never said the readers are families, on phones, plain words</a:t>
             </a:r>
             <a:endParaRPr lang="en-US" sz="1450" dirty="0"/>
           </a:p>
@@ -6061,7 +6061,7 @@
                 <a:ea typeface="Inter" pitchFamily="34" charset="-122"/>
                 <a:cs typeface="Inter" pitchFamily="34" charset="-120"/>
               </a:rPr>
-              <a:t>No action item: end with what to do, by when</a:t>
+              <a:t>Missing FORMAT: never asked for an action item with a date</a:t>
             </a:r>
             <a:endParaRPr lang="en-US" sz="1450" dirty="0"/>
           </a:p>
@@ -6178,7 +6178,7 @@
                 <a:ea typeface="Inter" pitchFamily="34" charset="-122"/>
                 <a:cs typeface="Inter" pitchFamily="34" charset="-120"/>
               </a:rPr>
-              <a:t>Voice: warm it up before it goes out</a:t>
+              <a:t>Missing ROLE: never said "a warm teacher who sounds like me"</a:t>
             </a:r>
             <a:endParaRPr lang="en-US" sz="1450" dirty="0"/>
           </a:p>
@@ -6209,7 +6209,7 @@
               <a:buNone/>
             </a:pPr>
             <a:r>
-              <a:rPr lang="en-US" sz="1600" i="1" dirty="0">
+              <a:rPr lang="en-US" sz="1500" i="1" dirty="0">
                 <a:solidFill>
                   <a:srgbClr val="5B6B7A"/>
                 </a:solidFill>
@@ -6217,9 +6217,9 @@
                 <a:ea typeface="Inter" pitchFamily="34" charset="-122"/>
                 <a:cs typeface="Inter" pitchFamily="34" charset="-120"/>
               </a:rPr>
-              <a:t>The fix kit is four prompts: shorter · plainer · lead with the action · sound like me.</a:t>
-            </a:r>
-            <a:endParaRPr lang="en-US" sz="1600" dirty="0"/>
+              <a:t>A bad message is usually a prompt that skipped part of the formula: Role · Task · Context · Format. Diagnose the part, then hand it back.</a:t>
+            </a:r>
+            <a:endParaRPr lang="en-US" sz="1500" dirty="0"/>
           </a:p>
         </p:txBody>
       </p:sp>
@@ -6572,7 +6572,7 @@
                 <a:ea typeface="Inter" pitchFamily="34" charset="-122"/>
                 <a:cs typeface="Inter" pitchFamily="34" charset="-120"/>
               </a:rPr>
-              <a:t>Her roster: several families who read other languages. Access is the assignment.</a:t>
+              <a:t>Her tone kit: 'warmer, shorter, plainer,' the read-aloud test, the 24-hour rule.</a:t>
             </a:r>
             <a:endParaRPr lang="en-US" sz="1000" dirty="0"/>
           </a:p>
@@ -6611,7 +6611,7 @@
                 <a:ea typeface="Inter" pitchFamily="34" charset="-122"/>
                 <a:cs typeface="Inter" pitchFamily="34" charset="-120"/>
               </a:rPr>
-              <a:t>THE FAMILIES OUR MESSAGES NEVER REACH</a:t>
+              <a:t>SMALL ENOUGH TO MEMORIZE</a:t>
             </a:r>
             <a:endParaRPr lang="en-US" sz="1200" dirty="0"/>
           </a:p>
@@ -6650,7 +6650,7 @@
                 <a:ea typeface="Inter" pitchFamily="34" charset="-122"/>
                 <a:cs typeface="Inter" pitchFamily="34" charset="-120"/>
               </a:rPr>
-              <a:t>The access gap</a:t>
+              <a:t>The tone-repair kit</a:t>
             </a:r>
             <a:endParaRPr lang="en-US" sz="3200" dirty="0"/>
           </a:p>
@@ -6664,12 +6664,12 @@
         </p:nvSpPr>
         <p:spPr>
           <a:xfrm>
-            <a:off x="640080" y="1600200"/>
-            <a:ext cx="5257800" cy="3383280"/>
+            <a:off x="640080" y="1554480"/>
+            <a:ext cx="3520440" cy="3108960"/>
           </a:xfrm>
           <a:prstGeom prst="roundRect">
             <a:avLst>
-              <a:gd name="adj" fmla="val 2432"/>
+              <a:gd name="adj" fmla="val 2647"/>
             </a:avLst>
           </a:prstGeom>
           <a:solidFill>
@@ -6691,34 +6691,34 @@
         </p:nvSpPr>
         <p:spPr>
           <a:xfrm>
-            <a:off x="640080" y="1783080"/>
-            <a:ext cx="5257800" cy="320040"/>
-          </a:xfrm>
-          <a:prstGeom prst="rect">
-            <a:avLst/>
-          </a:prstGeom>
-          <a:noFill/>
-          <a:ln/>
-        </p:spPr>
-        <p:txBody>
-          <a:bodyPr wrap="square" lIns="0" tIns="0" rIns="0" bIns="0" rtlCol="0" anchor="ctr"/>
-          <a:lstStyle/>
-          <a:p>
-            <a:pPr algn="ctr" indent="0" marL="0">
-              <a:buNone/>
-            </a:pPr>
-            <a:r>
-              <a:rPr lang="en-US" sz="1300" b="1" spc="200" kern="0" dirty="0">
-                <a:solidFill>
-                  <a:srgbClr val="13293D"/>
-                </a:solidFill>
-                <a:latin typeface="Inter" pitchFamily="34" charset="0"/>
-                <a:ea typeface="Inter" pitchFamily="34" charset="-122"/>
-                <a:cs typeface="Inter" pitchFamily="34" charset="-120"/>
-              </a:rPr>
-              <a:t>ENGLISH LEARNERS, U.S. SCHOOLS</a:t>
-            </a:r>
-            <a:endParaRPr lang="en-US" sz="1300" dirty="0"/>
+            <a:off x="896112" y="1828800"/>
+            <a:ext cx="3017520" cy="457200"/>
+          </a:xfrm>
+          <a:prstGeom prst="rect">
+            <a:avLst/>
+          </a:prstGeom>
+          <a:noFill/>
+          <a:ln/>
+        </p:spPr>
+        <p:txBody>
+          <a:bodyPr wrap="square" lIns="0" tIns="0" rIns="0" bIns="0" rtlCol="0" anchor="ctr"/>
+          <a:lstStyle/>
+          <a:p>
+            <a:pPr indent="0" marL="0">
+              <a:buNone/>
+            </a:pPr>
+            <a:r>
+              <a:rPr lang="en-US" sz="2000" b="1" dirty="0">
+                <a:solidFill>
+                  <a:srgbClr val="2A9D8F"/>
+                </a:solidFill>
+                <a:latin typeface="Inter" pitchFamily="34" charset="0"/>
+                <a:ea typeface="Inter" pitchFamily="34" charset="-122"/>
+                <a:cs typeface="Inter" pitchFamily="34" charset="-120"/>
+              </a:rPr>
+              <a:t>Three commands</a:t>
+            </a:r>
+            <a:endParaRPr lang="en-US" sz="2000" dirty="0"/>
           </a:p>
         </p:txBody>
       </p:sp>
@@ -6730,59 +6730,20 @@
         </p:nvSpPr>
         <p:spPr>
           <a:xfrm>
-            <a:off x="640080" y="2103120"/>
-            <a:ext cx="5257800" cy="960120"/>
-          </a:xfrm>
-          <a:prstGeom prst="rect">
-            <a:avLst/>
-          </a:prstGeom>
-          <a:noFill/>
-          <a:ln/>
-        </p:spPr>
-        <p:txBody>
-          <a:bodyPr wrap="square" lIns="0" tIns="0" rIns="0" bIns="0" rtlCol="0" anchor="ctr"/>
-          <a:lstStyle/>
-          <a:p>
-            <a:pPr algn="ctr" indent="0" marL="0">
-              <a:buNone/>
-            </a:pPr>
-            <a:r>
-              <a:rPr lang="en-US" sz="5200" b="1" dirty="0">
-                <a:solidFill>
-                  <a:srgbClr val="13293D"/>
-                </a:solidFill>
-                <a:latin typeface="Inter" pitchFamily="34" charset="0"/>
-                <a:ea typeface="Inter" pitchFamily="34" charset="-122"/>
-                <a:cs typeface="Inter" pitchFamily="34" charset="-120"/>
-              </a:rPr>
-              <a:t>5.3M</a:t>
-            </a:r>
-            <a:endParaRPr lang="en-US" sz="5200" dirty="0"/>
-          </a:p>
-        </p:txBody>
-      </p:sp>
-      <p:sp>
-        <p:nvSpPr>
-          <p:cNvPr id="17" name="Text 14"/>
-          <p:cNvSpPr/>
-          <p:nvPr/>
-        </p:nvSpPr>
-        <p:spPr>
-          <a:xfrm>
-            <a:off x="914400" y="3108960"/>
-            <a:ext cx="4709160" cy="1737360"/>
-          </a:xfrm>
-          <a:prstGeom prst="rect">
-            <a:avLst/>
-          </a:prstGeom>
-          <a:noFill/>
-          <a:ln/>
-        </p:spPr>
-        <p:txBody>
-          <a:bodyPr wrap="square" lIns="0" tIns="0" rIns="0" bIns="0" rtlCol="0" anchor="ctr"/>
-          <a:lstStyle/>
-          <a:p>
-            <a:pPr algn="ctr" indent="0" marL="0">
+            <a:off x="896112" y="2377440"/>
+            <a:ext cx="3017520" cy="2103120"/>
+          </a:xfrm>
+          <a:prstGeom prst="rect">
+            <a:avLst/>
+          </a:prstGeom>
+          <a:noFill/>
+          <a:ln/>
+        </p:spPr>
+        <p:txBody>
+          <a:bodyPr wrap="square" lIns="0" tIns="0" rIns="0" bIns="0" rtlCol="0" anchor="t"/>
+          <a:lstStyle/>
+          <a:p>
+            <a:pPr indent="0" marL="0">
               <a:buNone/>
             </a:pPr>
             <a:r>
@@ -6794,7 +6755,7 @@
                 <a:ea typeface="Inter" pitchFamily="34" charset="-122"/>
                 <a:cs typeface="Inter" pitchFamily="34" charset="-120"/>
               </a:rPr>
-              <a:t>students, 10.6% of U.S. public school enrollment, are English learners; behind many is a family that reads another language. (NCES, 2024)</a:t>
+              <a:t>"Warmer." "Shorter." "Plainer." Ninety percent of drafts need exactly one.</a:t>
             </a:r>
             <a:endParaRPr lang="en-US" sz="1600" dirty="0"/>
           </a:p>
@@ -6802,26 +6763,26 @@
       </p:sp>
       <p:sp>
         <p:nvSpPr>
-          <p:cNvPr id="18" name="Shape 15"/>
-          <p:cNvSpPr/>
-          <p:nvPr/>
-        </p:nvSpPr>
-        <p:spPr>
-          <a:xfrm>
-            <a:off x="6263640" y="1600200"/>
-            <a:ext cx="5257800" cy="3383280"/>
+          <p:cNvPr id="17" name="Shape 14"/>
+          <p:cNvSpPr/>
+          <p:nvPr/>
+        </p:nvSpPr>
+        <p:spPr>
+          <a:xfrm>
+            <a:off x="4407408" y="1554480"/>
+            <a:ext cx="3520440" cy="3108960"/>
           </a:xfrm>
           <a:prstGeom prst="roundRect">
             <a:avLst>
-              <a:gd name="adj" fmla="val 2432"/>
+              <a:gd name="adj" fmla="val 2647"/>
             </a:avLst>
           </a:prstGeom>
           <a:solidFill>
-            <a:srgbClr val="EAF5F3"/>
+            <a:srgbClr val="F7F5F0"/>
           </a:solidFill>
           <a:ln w="12700">
             <a:solidFill>
-              <a:srgbClr val="EAF5F3"/>
+              <a:srgbClr val="F7F5F0"/>
             </a:solidFill>
             <a:prstDash val="solid"/>
           </a:ln>
@@ -6829,14 +6790,197 @@
       </p:sp>
       <p:sp>
         <p:nvSpPr>
+          <p:cNvPr id="18" name="Text 15"/>
+          <p:cNvSpPr/>
+          <p:nvPr/>
+        </p:nvSpPr>
+        <p:spPr>
+          <a:xfrm>
+            <a:off x="4663440" y="1828800"/>
+            <a:ext cx="3017520" cy="457200"/>
+          </a:xfrm>
+          <a:prstGeom prst="rect">
+            <a:avLst/>
+          </a:prstGeom>
+          <a:noFill/>
+          <a:ln/>
+        </p:spPr>
+        <p:txBody>
+          <a:bodyPr wrap="square" lIns="0" tIns="0" rIns="0" bIns="0" rtlCol="0" anchor="ctr"/>
+          <a:lstStyle/>
+          <a:p>
+            <a:pPr indent="0" marL="0">
+              <a:buNone/>
+            </a:pPr>
+            <a:r>
+              <a:rPr lang="en-US" sz="2000" b="1" dirty="0">
+                <a:solidFill>
+                  <a:srgbClr val="2A9D8F"/>
+                </a:solidFill>
+                <a:latin typeface="Inter" pitchFamily="34" charset="0"/>
+                <a:ea typeface="Inter" pitchFamily="34" charset="-122"/>
+                <a:cs typeface="Inter" pitchFamily="34" charset="-120"/>
+              </a:rPr>
+              <a:t>One test</a:t>
+            </a:r>
+            <a:endParaRPr lang="en-US" sz="2000" dirty="0"/>
+          </a:p>
+        </p:txBody>
+      </p:sp>
+      <p:sp>
+        <p:nvSpPr>
           <p:cNvPr id="19" name="Text 16"/>
           <p:cNvSpPr/>
           <p:nvPr/>
         </p:nvSpPr>
         <p:spPr>
           <a:xfrm>
-            <a:off x="6263640" y="1783080"/>
-            <a:ext cx="5257800" cy="320040"/>
+            <a:off x="4663440" y="2377440"/>
+            <a:ext cx="3017520" cy="2103120"/>
+          </a:xfrm>
+          <a:prstGeom prst="rect">
+            <a:avLst/>
+          </a:prstGeom>
+          <a:noFill/>
+          <a:ln/>
+        </p:spPr>
+        <p:txBody>
+          <a:bodyPr wrap="square" lIns="0" tIns="0" rIns="0" bIns="0" rtlCol="0" anchor="t"/>
+          <a:lstStyle/>
+          <a:p>
+            <a:pPr indent="0" marL="0">
+              <a:buNone/>
+            </a:pPr>
+            <a:r>
+              <a:rPr lang="en-US" sz="1600" dirty="0">
+                <a:solidFill>
+                  <a:srgbClr val="1B1F24"/>
+                </a:solidFill>
+                <a:latin typeface="Inter" pitchFamily="34" charset="0"/>
+                <a:ea typeface="Inter" pitchFamily="34" charset="-122"/>
+                <a:cs typeface="Inter" pitchFamily="34" charset="-120"/>
+              </a:rPr>
+              <a:t>Read it aloud. Your ear knows your voice better than your eyes do.</a:t>
+            </a:r>
+            <a:endParaRPr lang="en-US" sz="1600" dirty="0"/>
+          </a:p>
+        </p:txBody>
+      </p:sp>
+      <p:sp>
+        <p:nvSpPr>
+          <p:cNvPr id="20" name="Shape 17"/>
+          <p:cNvSpPr/>
+          <p:nvPr/>
+        </p:nvSpPr>
+        <p:spPr>
+          <a:xfrm>
+            <a:off x="8174736" y="1554480"/>
+            <a:ext cx="3520440" cy="3108960"/>
+          </a:xfrm>
+          <a:prstGeom prst="roundRect">
+            <a:avLst>
+              <a:gd name="adj" fmla="val 2647"/>
+            </a:avLst>
+          </a:prstGeom>
+          <a:solidFill>
+            <a:srgbClr val="F7F5F0"/>
+          </a:solidFill>
+          <a:ln w="12700">
+            <a:solidFill>
+              <a:srgbClr val="F7F5F0"/>
+            </a:solidFill>
+            <a:prstDash val="solid"/>
+          </a:ln>
+        </p:spPr>
+      </p:sp>
+      <p:sp>
+        <p:nvSpPr>
+          <p:cNvPr id="21" name="Text 18"/>
+          <p:cNvSpPr/>
+          <p:nvPr/>
+        </p:nvSpPr>
+        <p:spPr>
+          <a:xfrm>
+            <a:off x="8430768" y="1828800"/>
+            <a:ext cx="3017520" cy="457200"/>
+          </a:xfrm>
+          <a:prstGeom prst="rect">
+            <a:avLst/>
+          </a:prstGeom>
+          <a:noFill/>
+          <a:ln/>
+        </p:spPr>
+        <p:txBody>
+          <a:bodyPr wrap="square" lIns="0" tIns="0" rIns="0" bIns="0" rtlCol="0" anchor="ctr"/>
+          <a:lstStyle/>
+          <a:p>
+            <a:pPr indent="0" marL="0">
+              <a:buNone/>
+            </a:pPr>
+            <a:r>
+              <a:rPr lang="en-US" sz="2000" b="1" dirty="0">
+                <a:solidFill>
+                  <a:srgbClr val="2A9D8F"/>
+                </a:solidFill>
+                <a:latin typeface="Inter" pitchFamily="34" charset="0"/>
+                <a:ea typeface="Inter" pitchFamily="34" charset="-122"/>
+                <a:cs typeface="Inter" pitchFamily="34" charset="-120"/>
+              </a:rPr>
+              <a:t>One rule</a:t>
+            </a:r>
+            <a:endParaRPr lang="en-US" sz="2000" dirty="0"/>
+          </a:p>
+        </p:txBody>
+      </p:sp>
+      <p:sp>
+        <p:nvSpPr>
+          <p:cNvPr id="22" name="Text 19"/>
+          <p:cNvSpPr/>
+          <p:nvPr/>
+        </p:nvSpPr>
+        <p:spPr>
+          <a:xfrm>
+            <a:off x="8430768" y="2377440"/>
+            <a:ext cx="3017520" cy="2103120"/>
+          </a:xfrm>
+          <a:prstGeom prst="rect">
+            <a:avLst/>
+          </a:prstGeom>
+          <a:noFill/>
+          <a:ln/>
+        </p:spPr>
+        <p:txBody>
+          <a:bodyPr wrap="square" lIns="0" tIns="0" rIns="0" bIns="0" rtlCol="0" anchor="t"/>
+          <a:lstStyle/>
+          <a:p>
+            <a:pPr indent="0" marL="0">
+              <a:buNone/>
+            </a:pPr>
+            <a:r>
+              <a:rPr lang="en-US" sz="1600" dirty="0">
+                <a:solidFill>
+                  <a:srgbClr val="1B1F24"/>
+                </a:solidFill>
+                <a:latin typeface="Inter" pitchFamily="34" charset="0"/>
+                <a:ea typeface="Inter" pitchFamily="34" charset="-122"/>
+                <a:cs typeface="Inter" pitchFamily="34" charset="-120"/>
+              </a:rPr>
+              <a:t>The 24-hour rule: written angry waits a day, unless safety can't wait.</a:t>
+            </a:r>
+            <a:endParaRPr lang="en-US" sz="1600" dirty="0"/>
+          </a:p>
+        </p:txBody>
+      </p:sp>
+      <p:sp>
+        <p:nvSpPr>
+          <p:cNvPr id="23" name="Text 20"/>
+          <p:cNvSpPr/>
+          <p:nvPr/>
+        </p:nvSpPr>
+        <p:spPr>
+          <a:xfrm>
+            <a:off x="640080" y="4937760"/>
+            <a:ext cx="10972800" cy="457200"/>
           </a:xfrm>
           <a:prstGeom prst="rect">
             <a:avLst/>
@@ -6852,146 +6996,6 @@
               <a:buNone/>
             </a:pPr>
             <a:r>
-              <a:rPr lang="en-US" sz="1300" b="1" spc="200" kern="0" dirty="0">
-                <a:solidFill>
-                  <a:srgbClr val="2A9D8F"/>
-                </a:solidFill>
-                <a:latin typeface="Inter" pitchFamily="34" charset="0"/>
-                <a:ea typeface="Inter" pitchFamily="34" charset="-122"/>
-                <a:cs typeface="Inter" pitchFamily="34" charset="-120"/>
-              </a:rPr>
-              <a:t>WHAT FEDERAL GUIDANCE REQUIRES</a:t>
-            </a:r>
-            <a:endParaRPr lang="en-US" sz="1300" dirty="0"/>
-          </a:p>
-        </p:txBody>
-      </p:sp>
-      <p:sp>
-        <p:nvSpPr>
-          <p:cNvPr id="20" name="Text 17"/>
-          <p:cNvSpPr/>
-          <p:nvPr/>
-        </p:nvSpPr>
-        <p:spPr>
-          <a:xfrm>
-            <a:off x="6263640" y="2121408"/>
-            <a:ext cx="5257800" cy="1051560"/>
-          </a:xfrm>
-          <a:prstGeom prst="rect">
-            <a:avLst/>
-          </a:prstGeom>
-          <a:noFill/>
-          <a:ln/>
-        </p:spPr>
-        <p:txBody>
-          <a:bodyPr wrap="square" lIns="0" tIns="0" rIns="0" bIns="0" rtlCol="0" anchor="ctr"/>
-          <a:lstStyle/>
-          <a:p>
-            <a:pPr algn="ctr" indent="0" marL="0">
-              <a:lnSpc>
-                <a:spcPct val="105000"/>
-              </a:lnSpc>
-              <a:buNone/>
-            </a:pPr>
-            <a:r>
-              <a:rPr lang="en-US" sz="2600" b="1" dirty="0">
-                <a:solidFill>
-                  <a:srgbClr val="2A9D8F"/>
-                </a:solidFill>
-                <a:latin typeface="Inter" pitchFamily="34" charset="0"/>
-                <a:ea typeface="Inter" pitchFamily="34" charset="-122"/>
-                <a:cs typeface="Inter" pitchFamily="34" charset="-120"/>
-              </a:rPr>
-              <a:t>A language they</a:t>
-            </a:r>
-            <a:endParaRPr lang="en-US" sz="2600" dirty="0"/>
-          </a:p>
-          <a:p>
-            <a:pPr algn="ctr" indent="0" marL="0">
-              <a:lnSpc>
-                <a:spcPct val="105000"/>
-              </a:lnSpc>
-              <a:buNone/>
-            </a:pPr>
-            <a:r>
-              <a:rPr lang="en-US" sz="2600" b="1" dirty="0">
-                <a:solidFill>
-                  <a:srgbClr val="2A9D8F"/>
-                </a:solidFill>
-                <a:latin typeface="Inter" pitchFamily="34" charset="0"/>
-                <a:ea typeface="Inter" pitchFamily="34" charset="-122"/>
-                <a:cs typeface="Inter" pitchFamily="34" charset="-120"/>
-              </a:rPr>
-              <a:t>can understand</a:t>
-            </a:r>
-            <a:endParaRPr lang="en-US" sz="2600" dirty="0"/>
-          </a:p>
-        </p:txBody>
-      </p:sp>
-      <p:sp>
-        <p:nvSpPr>
-          <p:cNvPr id="21" name="Text 18"/>
-          <p:cNvSpPr/>
-          <p:nvPr/>
-        </p:nvSpPr>
-        <p:spPr>
-          <a:xfrm>
-            <a:off x="6537960" y="3200400"/>
-            <a:ext cx="4709160" cy="1645920"/>
-          </a:xfrm>
-          <a:prstGeom prst="rect">
-            <a:avLst/>
-          </a:prstGeom>
-          <a:noFill/>
-          <a:ln/>
-        </p:spPr>
-        <p:txBody>
-          <a:bodyPr wrap="square" lIns="0" tIns="0" rIns="0" bIns="0" rtlCol="0" anchor="ctr"/>
-          <a:lstStyle/>
-          <a:p>
-            <a:pPr algn="ctr" indent="0" marL="0">
-              <a:buNone/>
-            </a:pPr>
-            <a:r>
-              <a:rPr lang="en-US" sz="1600" dirty="0">
-                <a:solidFill>
-                  <a:srgbClr val="1B1F24"/>
-                </a:solidFill>
-                <a:latin typeface="Inter" pitchFamily="34" charset="0"/>
-                <a:ea typeface="Inter" pitchFamily="34" charset="-122"/>
-                <a:cs typeface="Inter" pitchFamily="34" charset="-120"/>
-              </a:rPr>
-              <a:t>Schools must communicate with limited-English-proficient parents in a language they can understand: the same information other families get. (ED/DOJ, 2015)</a:t>
-            </a:r>
-            <a:endParaRPr lang="en-US" sz="1600" dirty="0"/>
-          </a:p>
-        </p:txBody>
-      </p:sp>
-      <p:sp>
-        <p:nvSpPr>
-          <p:cNvPr id="22" name="Text 19"/>
-          <p:cNvSpPr/>
-          <p:nvPr/>
-        </p:nvSpPr>
-        <p:spPr>
-          <a:xfrm>
-            <a:off x="640080" y="5349240"/>
-            <a:ext cx="10972800" cy="502920"/>
-          </a:xfrm>
-          <a:prstGeom prst="rect">
-            <a:avLst/>
-          </a:prstGeom>
-          <a:noFill/>
-          <a:ln/>
-        </p:spPr>
-        <p:txBody>
-          <a:bodyPr wrap="square" lIns="0" tIns="0" rIns="0" bIns="0" rtlCol="0" anchor="ctr"/>
-          <a:lstStyle/>
-          <a:p>
-            <a:pPr algn="ctr" indent="0" marL="0">
-              <a:buNone/>
-            </a:pPr>
-            <a:r>
               <a:rPr lang="en-US" sz="1900" b="1" dirty="0">
                 <a:solidFill>
                   <a:srgbClr val="13293D"/>
@@ -7000,7 +7004,7 @@
                 <a:ea typeface="Inter" pitchFamily="34" charset="-122"/>
                 <a:cs typeface="Inter" pitchFamily="34" charset="-120"/>
               </a:rPr>
-              <a:t>Every English-only newsletter quietly leaves families out of the conversation that changes outcomes.</a:t>
+              <a:t>It fits on the handout's back pocket, and it saves a hundred small regrets a year.</a:t>
             </a:r>
             <a:endParaRPr lang="en-US" sz="1900" dirty="0"/>
           </a:p>
@@ -7355,7 +7359,7 @@
                 <a:ea typeface="Inter" pitchFamily="34" charset="-122"/>
                 <a:cs typeface="Inter" pitchFamily="34" charset="-120"/>
               </a:rPr>
-              <a:t>Her translation plan: plain language first, district channel for official, human check.</a:t>
+              <a:t>Her repair calls: cold gets 'warmer,' rambling gets 'shorter,' jargon gets 'plainer.'</a:t>
             </a:r>
             <a:endParaRPr lang="en-US" sz="1000" dirty="0"/>
           </a:p>
@@ -7394,7 +7398,7 @@
                 <a:ea typeface="Inter" pitchFamily="34" charset="-122"/>
                 <a:cs typeface="Inter" pitchFamily="34" charset="-120"/>
               </a:rPr>
-              <a:t>THE FOUR RULES</a:t>
+              <a:t>PRACTICE · ONE COMMAND EACH: WARMER, SHORTER, OR PLAINER?</a:t>
             </a:r>
             <a:endParaRPr lang="en-US" sz="1200" dirty="0"/>
           </a:p>
@@ -7409,7 +7413,7 @@
         <p:spPr>
           <a:xfrm>
             <a:off x="548640" y="384048"/>
-            <a:ext cx="11091672" cy="777240"/>
+            <a:ext cx="7955280" cy="777240"/>
           </a:xfrm>
           <a:prstGeom prst="rect">
             <a:avLst/>
@@ -7433,7 +7437,7 @@
                 <a:ea typeface="Inter" pitchFamily="34" charset="-122"/>
                 <a:cs typeface="Inter" pitchFamily="34" charset="-120"/>
               </a:rPr>
-              <a:t>Translation, responsibly</a:t>
+              <a:t>Call the repair</a:t>
             </a:r>
             <a:endParaRPr lang="en-US" sz="3200" dirty="0"/>
           </a:p>
@@ -7441,18 +7445,57 @@
       </p:sp>
       <p:sp>
         <p:nvSpPr>
-          <p:cNvPr id="14" name="Shape 11"/>
-          <p:cNvSpPr/>
-          <p:nvPr/>
-        </p:nvSpPr>
-        <p:spPr>
-          <a:xfrm>
-            <a:off x="640080" y="1417320"/>
-            <a:ext cx="5349240" cy="1920240"/>
+          <p:cNvPr id="14" name="Text 11"/>
+          <p:cNvSpPr/>
+          <p:nvPr/>
+        </p:nvSpPr>
+        <p:spPr>
+          <a:xfrm>
+            <a:off x="731520" y="1508760"/>
+            <a:ext cx="548640" cy="1005840"/>
+          </a:xfrm>
+          <a:prstGeom prst="rect">
+            <a:avLst/>
+          </a:prstGeom>
+          <a:noFill/>
+          <a:ln/>
+        </p:spPr>
+        <p:txBody>
+          <a:bodyPr wrap="square" lIns="0" tIns="0" rIns="0" bIns="0" rtlCol="0" anchor="ctr"/>
+          <a:lstStyle/>
+          <a:p>
+            <a:pPr indent="0" marL="0">
+              <a:buNone/>
+            </a:pPr>
+            <a:r>
+              <a:rPr lang="en-US" sz="2200" b="1" dirty="0">
+                <a:solidFill>
+                  <a:srgbClr val="2A9D8F"/>
+                </a:solidFill>
+                <a:latin typeface="Inter" pitchFamily="34" charset="0"/>
+                <a:ea typeface="Inter" pitchFamily="34" charset="-122"/>
+                <a:cs typeface="Inter" pitchFamily="34" charset="-120"/>
+              </a:rPr>
+              <a:t>A</a:t>
+            </a:r>
+            <a:endParaRPr lang="en-US" sz="2200" dirty="0"/>
+          </a:p>
+        </p:txBody>
+      </p:sp>
+      <p:sp>
+        <p:nvSpPr>
+          <p:cNvPr id="15" name="Shape 12"/>
+          <p:cNvSpPr/>
+          <p:nvPr/>
+        </p:nvSpPr>
+        <p:spPr>
+          <a:xfrm>
+            <a:off x="1371600" y="1371600"/>
+            <a:ext cx="5577840" cy="1280160"/>
           </a:xfrm>
           <a:prstGeom prst="roundRect">
             <a:avLst>
-              <a:gd name="adj" fmla="val 4286"/>
+              <a:gd name="adj" fmla="val 6429"/>
             </a:avLst>
           </a:prstGeom>
           <a:solidFill>
@@ -7468,30 +7511,108 @@
       </p:sp>
       <p:sp>
         <p:nvSpPr>
-          <p:cNvPr id="15" name="Text 12"/>
-          <p:cNvSpPr/>
-          <p:nvPr/>
-        </p:nvSpPr>
-        <p:spPr>
-          <a:xfrm>
-            <a:off x="914400" y="1600200"/>
-            <a:ext cx="4800600" cy="457200"/>
-          </a:xfrm>
-          <a:prstGeom prst="rect">
-            <a:avLst/>
-          </a:prstGeom>
-          <a:noFill/>
-          <a:ln/>
-        </p:spPr>
-        <p:txBody>
-          <a:bodyPr wrap="square" lIns="0" tIns="0" rIns="0" bIns="0" rtlCol="0" anchor="ctr"/>
-          <a:lstStyle/>
-          <a:p>
-            <a:pPr indent="0" marL="0">
-              <a:buNone/>
-            </a:pPr>
-            <a:r>
-              <a:rPr lang="en-US" sz="1900" b="1" dirty="0">
+          <p:cNvPr id="16" name="Text 13"/>
+          <p:cNvSpPr/>
+          <p:nvPr/>
+        </p:nvSpPr>
+        <p:spPr>
+          <a:xfrm>
+            <a:off x="1627632" y="1444752"/>
+            <a:ext cx="5074920" cy="1143000"/>
+          </a:xfrm>
+          <a:prstGeom prst="rect">
+            <a:avLst/>
+          </a:prstGeom>
+          <a:noFill/>
+          <a:ln/>
+        </p:spPr>
+        <p:txBody>
+          <a:bodyPr wrap="square" lIns="0" tIns="0" rIns="0" bIns="0" rtlCol="0" anchor="ctr"/>
+          <a:lstStyle/>
+          <a:p>
+            <a:pPr indent="0" marL="0">
+              <a:buNone/>
+            </a:pPr>
+            <a:r>
+              <a:rPr lang="en-US" sz="1500" i="1" dirty="0">
+                <a:solidFill>
+                  <a:srgbClr val="1B1F24"/>
+                </a:solidFill>
+                <a:latin typeface="Inter" pitchFamily="34" charset="0"/>
+                <a:ea typeface="Inter" pitchFamily="34" charset="-122"/>
+                <a:cs typeface="Inter" pitchFamily="34" charset="-120"/>
+              </a:rPr>
+              <a:t>"Reminder: the permission slip was due Monday. Students without one cannot attend."</a:t>
+            </a:r>
+            <a:endParaRPr lang="en-US" sz="1500" dirty="0"/>
+          </a:p>
+        </p:txBody>
+      </p:sp>
+      <p:sp>
+        <p:nvSpPr>
+          <p:cNvPr id="17" name="Text 14"/>
+          <p:cNvSpPr/>
+          <p:nvPr/>
+        </p:nvSpPr>
+        <p:spPr>
+          <a:xfrm>
+            <a:off x="7223760" y="1444752"/>
+            <a:ext cx="4389120" cy="1143000"/>
+          </a:xfrm>
+          <a:prstGeom prst="rect">
+            <a:avLst/>
+          </a:prstGeom>
+          <a:noFill/>
+          <a:ln/>
+        </p:spPr>
+        <p:txBody>
+          <a:bodyPr wrap="square" lIns="0" tIns="0" rIns="0" bIns="0" rtlCol="0" anchor="ctr"/>
+          <a:lstStyle/>
+          <a:p>
+            <a:pPr indent="0" marL="0">
+              <a:buNone/>
+            </a:pPr>
+            <a:r>
+              <a:rPr lang="en-US" sz="1250" dirty="0">
+                <a:solidFill>
+                  <a:srgbClr val="5B6B7A"/>
+                </a:solidFill>
+                <a:latin typeface="Inter" pitchFamily="34" charset="0"/>
+                <a:ea typeface="Inter" pitchFamily="34" charset="-122"/>
+                <a:cs typeface="Inter" pitchFamily="34" charset="-120"/>
+              </a:rPr>
+              <a:t>Warmer: "We're missing a few permission slips. Send yours back by tomorrow and everyone's on the bus."</a:t>
+            </a:r>
+            <a:endParaRPr lang="en-US" sz="1250" dirty="0"/>
+          </a:p>
+        </p:txBody>
+      </p:sp>
+      <p:sp>
+        <p:nvSpPr>
+          <p:cNvPr id="18" name="Text 15"/>
+          <p:cNvSpPr/>
+          <p:nvPr/>
+        </p:nvSpPr>
+        <p:spPr>
+          <a:xfrm>
+            <a:off x="731520" y="2926080"/>
+            <a:ext cx="548640" cy="1005840"/>
+          </a:xfrm>
+          <a:prstGeom prst="rect">
+            <a:avLst/>
+          </a:prstGeom>
+          <a:noFill/>
+          <a:ln/>
+        </p:spPr>
+        <p:txBody>
+          <a:bodyPr wrap="square" lIns="0" tIns="0" rIns="0" bIns="0" rtlCol="0" anchor="ctr"/>
+          <a:lstStyle/>
+          <a:p>
+            <a:pPr indent="0" marL="0">
+              <a:buNone/>
+            </a:pPr>
+            <a:r>
+              <a:rPr lang="en-US" sz="2200" b="1" dirty="0">
                 <a:solidFill>
                   <a:srgbClr val="2A9D8F"/>
                 </a:solidFill>
@@ -7499,65 +7620,26 @@
                 <a:ea typeface="Inter" pitchFamily="34" charset="-122"/>
                 <a:cs typeface="Inter" pitchFamily="34" charset="-120"/>
               </a:rPr>
-              <a:t>1 · Plain language first</a:t>
-            </a:r>
-            <a:endParaRPr lang="en-US" sz="1900" dirty="0"/>
-          </a:p>
-        </p:txBody>
-      </p:sp>
-      <p:sp>
-        <p:nvSpPr>
-          <p:cNvPr id="16" name="Text 13"/>
-          <p:cNvSpPr/>
-          <p:nvPr/>
-        </p:nvSpPr>
-        <p:spPr>
-          <a:xfrm>
-            <a:off x="914400" y="2130552"/>
-            <a:ext cx="4800600" cy="1097280"/>
-          </a:xfrm>
-          <a:prstGeom prst="rect">
-            <a:avLst/>
-          </a:prstGeom>
-          <a:noFill/>
-          <a:ln/>
-        </p:spPr>
-        <p:txBody>
-          <a:bodyPr wrap="square" lIns="0" tIns="0" rIns="0" bIns="0" rtlCol="0" anchor="ctr"/>
-          <a:lstStyle/>
-          <a:p>
-            <a:pPr indent="0" marL="0">
-              <a:buNone/>
-            </a:pPr>
-            <a:r>
-              <a:rPr lang="en-US" sz="1550" dirty="0">
-                <a:solidFill>
-                  <a:srgbClr val="1B1F24"/>
-                </a:solidFill>
-                <a:latin typeface="Inter" pitchFamily="34" charset="0"/>
-                <a:ea typeface="Inter" pitchFamily="34" charset="-122"/>
-                <a:cs typeface="Inter" pitchFamily="34" charset="-120"/>
-              </a:rPr>
-              <a:t>Short sentences, no idioms. Plain English translates well; clever English translates badly.</a:t>
-            </a:r>
-            <a:endParaRPr lang="en-US" sz="1550" dirty="0"/>
-          </a:p>
-        </p:txBody>
-      </p:sp>
-      <p:sp>
-        <p:nvSpPr>
-          <p:cNvPr id="17" name="Shape 14"/>
-          <p:cNvSpPr/>
-          <p:nvPr/>
-        </p:nvSpPr>
-        <p:spPr>
-          <a:xfrm>
-            <a:off x="6263640" y="1417320"/>
-            <a:ext cx="5349240" cy="1920240"/>
+              <a:t>B</a:t>
+            </a:r>
+            <a:endParaRPr lang="en-US" sz="2200" dirty="0"/>
+          </a:p>
+        </p:txBody>
+      </p:sp>
+      <p:sp>
+        <p:nvSpPr>
+          <p:cNvPr id="19" name="Shape 16"/>
+          <p:cNvSpPr/>
+          <p:nvPr/>
+        </p:nvSpPr>
+        <p:spPr>
+          <a:xfrm>
+            <a:off x="1371600" y="2788920"/>
+            <a:ext cx="5577840" cy="1280160"/>
           </a:xfrm>
           <a:prstGeom prst="roundRect">
             <a:avLst>
-              <a:gd name="adj" fmla="val 4286"/>
+              <a:gd name="adj" fmla="val 6429"/>
             </a:avLst>
           </a:prstGeom>
           <a:solidFill>
@@ -7573,30 +7655,108 @@
       </p:sp>
       <p:sp>
         <p:nvSpPr>
-          <p:cNvPr id="18" name="Text 15"/>
-          <p:cNvSpPr/>
-          <p:nvPr/>
-        </p:nvSpPr>
-        <p:spPr>
-          <a:xfrm>
-            <a:off x="6537960" y="1600200"/>
-            <a:ext cx="4800600" cy="457200"/>
-          </a:xfrm>
-          <a:prstGeom prst="rect">
-            <a:avLst/>
-          </a:prstGeom>
-          <a:noFill/>
-          <a:ln/>
-        </p:spPr>
-        <p:txBody>
-          <a:bodyPr wrap="square" lIns="0" tIns="0" rIns="0" bIns="0" rtlCol="0" anchor="ctr"/>
-          <a:lstStyle/>
-          <a:p>
-            <a:pPr indent="0" marL="0">
-              <a:buNone/>
-            </a:pPr>
-            <a:r>
-              <a:rPr lang="en-US" sz="1900" b="1" dirty="0">
+          <p:cNvPr id="20" name="Text 17"/>
+          <p:cNvSpPr/>
+          <p:nvPr/>
+        </p:nvSpPr>
+        <p:spPr>
+          <a:xfrm>
+            <a:off x="1627632" y="2862072"/>
+            <a:ext cx="5074920" cy="1143000"/>
+          </a:xfrm>
+          <a:prstGeom prst="rect">
+            <a:avLst/>
+          </a:prstGeom>
+          <a:noFill/>
+          <a:ln/>
+        </p:spPr>
+        <p:txBody>
+          <a:bodyPr wrap="square" lIns="0" tIns="0" rIns="0" bIns="0" rtlCol="0" anchor="ctr"/>
+          <a:lstStyle/>
+          <a:p>
+            <a:pPr indent="0" marL="0">
+              <a:buNone/>
+            </a:pPr>
+            <a:r>
+              <a:rPr lang="en-US" sz="1500" i="1" dirty="0">
+                <a:solidFill>
+                  <a:srgbClr val="1B1F24"/>
+                </a:solidFill>
+                <a:latin typeface="Inter" pitchFamily="34" charset="0"/>
+                <a:ea typeface="Inter" pitchFamily="34" charset="-122"/>
+                <a:cs typeface="Inter" pitchFamily="34" charset="-120"/>
+              </a:rPr>
+              <a:t>Sixty words of throat-clearing to say picture day is Friday</a:t>
+            </a:r>
+            <a:endParaRPr lang="en-US" sz="1500" dirty="0"/>
+          </a:p>
+        </p:txBody>
+      </p:sp>
+      <p:sp>
+        <p:nvSpPr>
+          <p:cNvPr id="21" name="Text 18"/>
+          <p:cNvSpPr/>
+          <p:nvPr/>
+        </p:nvSpPr>
+        <p:spPr>
+          <a:xfrm>
+            <a:off x="7223760" y="2862072"/>
+            <a:ext cx="4389120" cy="1143000"/>
+          </a:xfrm>
+          <a:prstGeom prst="rect">
+            <a:avLst/>
+          </a:prstGeom>
+          <a:noFill/>
+          <a:ln/>
+        </p:spPr>
+        <p:txBody>
+          <a:bodyPr wrap="square" lIns="0" tIns="0" rIns="0" bIns="0" rtlCol="0" anchor="ctr"/>
+          <a:lstStyle/>
+          <a:p>
+            <a:pPr indent="0" marL="0">
+              <a:buNone/>
+            </a:pPr>
+            <a:r>
+              <a:rPr lang="en-US" sz="1250" dirty="0">
+                <a:solidFill>
+                  <a:srgbClr val="5B6B7A"/>
+                </a:solidFill>
+                <a:latin typeface="Inter" pitchFamily="34" charset="0"/>
+                <a:ea typeface="Inter" pitchFamily="34" charset="-122"/>
+                <a:cs typeface="Inter" pitchFamily="34" charset="-120"/>
+              </a:rPr>
+              <a:t>Shorter: "Picture day is Friday. Smiles optional, forms required."</a:t>
+            </a:r>
+            <a:endParaRPr lang="en-US" sz="1250" dirty="0"/>
+          </a:p>
+        </p:txBody>
+      </p:sp>
+      <p:sp>
+        <p:nvSpPr>
+          <p:cNvPr id="22" name="Text 19"/>
+          <p:cNvSpPr/>
+          <p:nvPr/>
+        </p:nvSpPr>
+        <p:spPr>
+          <a:xfrm>
+            <a:off x="731520" y="4343400"/>
+            <a:ext cx="548640" cy="1005840"/>
+          </a:xfrm>
+          <a:prstGeom prst="rect">
+            <a:avLst/>
+          </a:prstGeom>
+          <a:noFill/>
+          <a:ln/>
+        </p:spPr>
+        <p:txBody>
+          <a:bodyPr wrap="square" lIns="0" tIns="0" rIns="0" bIns="0" rtlCol="0" anchor="ctr"/>
+          <a:lstStyle/>
+          <a:p>
+            <a:pPr indent="0" marL="0">
+              <a:buNone/>
+            </a:pPr>
+            <a:r>
+              <a:rPr lang="en-US" sz="2200" b="1" dirty="0">
                 <a:solidFill>
                   <a:srgbClr val="2A9D8F"/>
                 </a:solidFill>
@@ -7604,65 +7764,26 @@
                 <a:ea typeface="Inter" pitchFamily="34" charset="-122"/>
                 <a:cs typeface="Inter" pitchFamily="34" charset="-120"/>
               </a:rPr>
-              <a:t>2 · Official docs go district</a:t>
-            </a:r>
-            <a:endParaRPr lang="en-US" sz="1900" dirty="0"/>
-          </a:p>
-        </p:txBody>
-      </p:sp>
-      <p:sp>
-        <p:nvSpPr>
-          <p:cNvPr id="19" name="Text 16"/>
-          <p:cNvSpPr/>
-          <p:nvPr/>
-        </p:nvSpPr>
-        <p:spPr>
-          <a:xfrm>
-            <a:off x="6537960" y="2130552"/>
-            <a:ext cx="4800600" cy="1097280"/>
-          </a:xfrm>
-          <a:prstGeom prst="rect">
-            <a:avLst/>
-          </a:prstGeom>
-          <a:noFill/>
-          <a:ln/>
-        </p:spPr>
-        <p:txBody>
-          <a:bodyPr wrap="square" lIns="0" tIns="0" rIns="0" bIns="0" rtlCol="0" anchor="ctr"/>
-          <a:lstStyle/>
-          <a:p>
-            <a:pPr indent="0" marL="0">
-              <a:buNone/>
-            </a:pPr>
-            <a:r>
-              <a:rPr lang="en-US" sz="1550" dirty="0">
-                <a:solidFill>
-                  <a:srgbClr val="1B1F24"/>
-                </a:solidFill>
-                <a:latin typeface="Inter" pitchFamily="34" charset="0"/>
-                <a:ea typeface="Inter" pitchFamily="34" charset="-122"/>
-                <a:cs typeface="Inter" pitchFamily="34" charset="-120"/>
-              </a:rPr>
-              <a:t>Rights, discipline, special education travel your district's translation channel, not a chatbot.</a:t>
-            </a:r>
-            <a:endParaRPr lang="en-US" sz="1550" dirty="0"/>
-          </a:p>
-        </p:txBody>
-      </p:sp>
-      <p:sp>
-        <p:nvSpPr>
-          <p:cNvPr id="20" name="Shape 17"/>
-          <p:cNvSpPr/>
-          <p:nvPr/>
-        </p:nvSpPr>
-        <p:spPr>
-          <a:xfrm>
-            <a:off x="640080" y="3520440"/>
-            <a:ext cx="5349240" cy="1920240"/>
+              <a:t>C</a:t>
+            </a:r>
+            <a:endParaRPr lang="en-US" sz="2200" dirty="0"/>
+          </a:p>
+        </p:txBody>
+      </p:sp>
+      <p:sp>
+        <p:nvSpPr>
+          <p:cNvPr id="23" name="Shape 20"/>
+          <p:cNvSpPr/>
+          <p:nvPr/>
+        </p:nvSpPr>
+        <p:spPr>
+          <a:xfrm>
+            <a:off x="1371600" y="4206240"/>
+            <a:ext cx="5577840" cy="1280160"/>
           </a:xfrm>
           <a:prstGeom prst="roundRect">
             <a:avLst>
-              <a:gd name="adj" fmla="val 4286"/>
+              <a:gd name="adj" fmla="val 6429"/>
             </a:avLst>
           </a:prstGeom>
           <a:solidFill>
@@ -7678,69 +7799,30 @@
       </p:sp>
       <p:sp>
         <p:nvSpPr>
-          <p:cNvPr id="21" name="Text 18"/>
-          <p:cNvSpPr/>
-          <p:nvPr/>
-        </p:nvSpPr>
-        <p:spPr>
-          <a:xfrm>
-            <a:off x="914400" y="3703320"/>
-            <a:ext cx="4800600" cy="457200"/>
-          </a:xfrm>
-          <a:prstGeom prst="rect">
-            <a:avLst/>
-          </a:prstGeom>
-          <a:noFill/>
-          <a:ln/>
-        </p:spPr>
-        <p:txBody>
-          <a:bodyPr wrap="square" lIns="0" tIns="0" rIns="0" bIns="0" rtlCol="0" anchor="ctr"/>
-          <a:lstStyle/>
-          <a:p>
-            <a:pPr indent="0" marL="0">
-              <a:buNone/>
-            </a:pPr>
-            <a:r>
-              <a:rPr lang="en-US" sz="1900" b="1" dirty="0">
-                <a:solidFill>
-                  <a:srgbClr val="2A9D8F"/>
-                </a:solidFill>
-                <a:latin typeface="Inter" pitchFamily="34" charset="0"/>
-                <a:ea typeface="Inter" pitchFamily="34" charset="-122"/>
-                <a:cs typeface="Inter" pitchFamily="34" charset="-120"/>
-              </a:rPr>
-              <a:t>3 · Human check when stakes rise</a:t>
-            </a:r>
-            <a:endParaRPr lang="en-US" sz="1900" dirty="0"/>
-          </a:p>
-        </p:txBody>
-      </p:sp>
-      <p:sp>
-        <p:nvSpPr>
-          <p:cNvPr id="22" name="Text 19"/>
-          <p:cNvSpPr/>
-          <p:nvPr/>
-        </p:nvSpPr>
-        <p:spPr>
-          <a:xfrm>
-            <a:off x="914400" y="4233672"/>
-            <a:ext cx="4800600" cy="1097280"/>
-          </a:xfrm>
-          <a:prstGeom prst="rect">
-            <a:avLst/>
-          </a:prstGeom>
-          <a:noFill/>
-          <a:ln/>
-        </p:spPr>
-        <p:txBody>
-          <a:bodyPr wrap="square" lIns="0" tIns="0" rIns="0" bIns="0" rtlCol="0" anchor="ctr"/>
-          <a:lstStyle/>
-          <a:p>
-            <a:pPr indent="0" marL="0">
-              <a:buNone/>
-            </a:pPr>
-            <a:r>
-              <a:rPr lang="en-US" sz="1550" dirty="0">
+          <p:cNvPr id="24" name="Text 21"/>
+          <p:cNvSpPr/>
+          <p:nvPr/>
+        </p:nvSpPr>
+        <p:spPr>
+          <a:xfrm>
+            <a:off x="1627632" y="4279392"/>
+            <a:ext cx="5074920" cy="1143000"/>
+          </a:xfrm>
+          <a:prstGeom prst="rect">
+            <a:avLst/>
+          </a:prstGeom>
+          <a:noFill/>
+          <a:ln/>
+        </p:spPr>
+        <p:txBody>
+          <a:bodyPr wrap="square" lIns="0" tIns="0" rIns="0" bIns="0" rtlCol="0" anchor="ctr"/>
+          <a:lstStyle/>
+          <a:p>
+            <a:pPr indent="0" marL="0">
+              <a:buNone/>
+            </a:pPr>
+            <a:r>
+              <a:rPr lang="en-US" sz="1500" i="1" dirty="0">
                 <a:solidFill>
                   <a:srgbClr val="1B1F24"/>
                 </a:solidFill>
@@ -7748,75 +7830,9 @@
                 <a:ea typeface="Inter" pitchFamily="34" charset="-122"/>
                 <a:cs typeface="Inter" pitchFamily="34" charset="-120"/>
               </a:rPr>
-              <a:t>A bilingual colleague, aide, or liaison reviews. Machine translation is helpful and imperfect.</a:t>
-            </a:r>
-            <a:endParaRPr lang="en-US" sz="1550" dirty="0"/>
-          </a:p>
-        </p:txBody>
-      </p:sp>
-      <p:sp>
-        <p:nvSpPr>
-          <p:cNvPr id="23" name="Shape 20"/>
-          <p:cNvSpPr/>
-          <p:nvPr/>
-        </p:nvSpPr>
-        <p:spPr>
-          <a:xfrm>
-            <a:off x="6263640" y="3520440"/>
-            <a:ext cx="5349240" cy="1920240"/>
-          </a:xfrm>
-          <a:prstGeom prst="roundRect">
-            <a:avLst>
-              <a:gd name="adj" fmla="val 4286"/>
-            </a:avLst>
-          </a:prstGeom>
-          <a:solidFill>
-            <a:srgbClr val="F7F5F0"/>
-          </a:solidFill>
-          <a:ln w="12700">
-            <a:solidFill>
-              <a:srgbClr val="F7F5F0"/>
-            </a:solidFill>
-            <a:prstDash val="solid"/>
-          </a:ln>
-        </p:spPr>
-      </p:sp>
-      <p:sp>
-        <p:nvSpPr>
-          <p:cNvPr id="24" name="Text 21"/>
-          <p:cNvSpPr/>
-          <p:nvPr/>
-        </p:nvSpPr>
-        <p:spPr>
-          <a:xfrm>
-            <a:off x="6537960" y="3703320"/>
-            <a:ext cx="4800600" cy="457200"/>
-          </a:xfrm>
-          <a:prstGeom prst="rect">
-            <a:avLst/>
-          </a:prstGeom>
-          <a:noFill/>
-          <a:ln/>
-        </p:spPr>
-        <p:txBody>
-          <a:bodyPr wrap="square" lIns="0" tIns="0" rIns="0" bIns="0" rtlCol="0" anchor="ctr"/>
-          <a:lstStyle/>
-          <a:p>
-            <a:pPr indent="0" marL="0">
-              <a:buNone/>
-            </a:pPr>
-            <a:r>
-              <a:rPr lang="en-US" sz="1900" b="1" dirty="0">
-                <a:solidFill>
-                  <a:srgbClr val="2A9D8F"/>
-                </a:solidFill>
-                <a:latin typeface="Inter" pitchFamily="34" charset="0"/>
-                <a:ea typeface="Inter" pitchFamily="34" charset="-122"/>
-                <a:cs typeface="Inter" pitchFamily="34" charset="-120"/>
-              </a:rPr>
-              <a:t>4 · Privacy speaks every language</a:t>
-            </a:r>
-            <a:endParaRPr lang="en-US" sz="1900" dirty="0"/>
+              <a:t>"Our formative assessment data indicates additional at-home numeracy reinforcement would benefit your student."</a:t>
+            </a:r>
+            <a:endParaRPr lang="en-US" sz="1500" dirty="0"/>
           </a:p>
         </p:txBody>
       </p:sp>
@@ -7828,34 +7844,34 @@
         </p:nvSpPr>
         <p:spPr>
           <a:xfrm>
-            <a:off x="6537960" y="4233672"/>
-            <a:ext cx="4800600" cy="1097280"/>
-          </a:xfrm>
-          <a:prstGeom prst="rect">
-            <a:avLst/>
-          </a:prstGeom>
-          <a:noFill/>
-          <a:ln/>
-        </p:spPr>
-        <p:txBody>
-          <a:bodyPr wrap="square" lIns="0" tIns="0" rIns="0" bIns="0" rtlCol="0" anchor="ctr"/>
-          <a:lstStyle/>
-          <a:p>
-            <a:pPr indent="0" marL="0">
-              <a:buNone/>
-            </a:pPr>
-            <a:r>
-              <a:rPr lang="en-US" sz="1550" dirty="0">
-                <a:solidFill>
-                  <a:srgbClr val="1B1F24"/>
-                </a:solidFill>
-                <a:latin typeface="Inter" pitchFamily="34" charset="0"/>
-                <a:ea typeface="Inter" pitchFamily="34" charset="-122"/>
-                <a:cs typeface="Inter" pitchFamily="34" charset="-120"/>
-              </a:rPr>
-              <a:t>No student details in a public tool, in any language. The rule doesn't take a language off.</a:t>
-            </a:r>
-            <a:endParaRPr lang="en-US" sz="1550" dirty="0"/>
+            <a:off x="7223760" y="4279392"/>
+            <a:ext cx="4389120" cy="1143000"/>
+          </a:xfrm>
+          <a:prstGeom prst="rect">
+            <a:avLst/>
+          </a:prstGeom>
+          <a:noFill/>
+          <a:ln/>
+        </p:spPr>
+        <p:txBody>
+          <a:bodyPr wrap="square" lIns="0" tIns="0" rIns="0" bIns="0" rtlCol="0" anchor="ctr"/>
+          <a:lstStyle/>
+          <a:p>
+            <a:pPr indent="0" marL="0">
+              <a:buNone/>
+            </a:pPr>
+            <a:r>
+              <a:rPr lang="en-US" sz="1250" dirty="0">
+                <a:solidFill>
+                  <a:srgbClr val="5B6B7A"/>
+                </a:solidFill>
+                <a:latin typeface="Inter" pitchFamily="34" charset="0"/>
+                <a:ea typeface="Inter" pitchFamily="34" charset="-122"/>
+                <a:cs typeface="Inter" pitchFamily="34" charset="-120"/>
+              </a:rPr>
+              <a:t>Plainer: "Your child is still working on multiplication. Ten minutes of practice at home this week would help."</a:t>
+            </a:r>
+            <a:endParaRPr lang="en-US" sz="1250" dirty="0"/>
           </a:p>
         </p:txBody>
       </p:sp>
@@ -7867,8 +7883,8 @@
         </p:nvSpPr>
         <p:spPr>
           <a:xfrm>
-            <a:off x="640080" y="5623560"/>
-            <a:ext cx="10972800" cy="457200"/>
+            <a:off x="640080" y="5760720"/>
+            <a:ext cx="10972800" cy="411480"/>
           </a:xfrm>
           <a:prstGeom prst="rect">
             <a:avLst/>
@@ -7884,17 +7900,17 @@
               <a:buNone/>
             </a:pPr>
             <a:r>
-              <a:rPr lang="en-US" sz="1900" b="1" dirty="0">
-                <a:solidFill>
-                  <a:srgbClr val="13293D"/>
-                </a:solidFill>
-                <a:latin typeface="Inter" pitchFamily="34" charset="0"/>
-                <a:ea typeface="Inter" pitchFamily="34" charset="-122"/>
-                <a:cs typeface="Inter" pitchFamily="34" charset="-120"/>
-              </a:rPr>
-              <a:t>Do these four, and your reach just grew by every family on your roster.</a:t>
-            </a:r>
-            <a:endParaRPr lang="en-US" sz="1900" dirty="0"/>
+              <a:rPr lang="en-US" sz="1500" i="1" dirty="0">
+                <a:solidFill>
+                  <a:srgbClr val="5B6B7A"/>
+                </a:solidFill>
+                <a:latin typeface="Inter" pitchFamily="34" charset="0"/>
+                <a:ea typeface="Inter" pitchFamily="34" charset="-122"/>
+                <a:cs typeface="Inter" pitchFamily="34" charset="-120"/>
+              </a:rPr>
+              <a:t>One command each, and the repair comes back in seconds: no excuse left for sending the cold version.</a:t>
+            </a:r>
+            <a:endParaRPr lang="en-US" sz="1500" dirty="0"/>
           </a:p>
         </p:txBody>
       </p:sp>
@@ -7912,7 +7928,7 @@
     <p:bg>
       <p:bgPr>
         <a:solidFill>
-          <a:srgbClr val="FFFFFF"/>
+          <a:srgbClr val="13293D"/>
         </a:solidFill>
       </p:bgPr>
     </p:bg>
@@ -7995,7 +8011,7 @@
             <a:r>
               <a:rPr lang="en-US" sz="1000" b="1" dirty="0">
                 <a:solidFill>
-                  <a:srgbClr val="13293D"/>
+                  <a:srgbClr val="FFFFFF"/>
                 </a:solidFill>
                 <a:latin typeface="Inter" pitchFamily="34" charset="0"/>
                 <a:ea typeface="Inter" pitchFamily="34" charset="-122"/>
@@ -8034,7 +8050,7 @@
             <a:r>
               <a:rPr lang="en-US" sz="900" dirty="0">
                 <a:solidFill>
-                  <a:srgbClr val="5B6B7A"/>
+                  <a:srgbClr val="9FB2C2"/>
                 </a:solidFill>
                 <a:latin typeface="Inter" pitchFamily="34" charset="0"/>
                 <a:ea typeface="Inter" pitchFamily="34" charset="-122"/>
@@ -8063,11 +8079,11 @@
             </a:avLst>
           </a:prstGeom>
           <a:solidFill>
-            <a:srgbClr val="F7F5F0"/>
+            <a:srgbClr val="1E3A50"/>
           </a:solidFill>
           <a:ln w="12700">
             <a:solidFill>
-              <a:srgbClr val="DCE3EA"/>
+              <a:srgbClr val="2A4A63"/>
             </a:solidFill>
             <a:prstDash val="solid"/>
           </a:ln>
@@ -8241,13 +8257,13 @@
             <a:r>
               <a:rPr lang="en-US" sz="1000" dirty="0">
                 <a:solidFill>
-                  <a:srgbClr val="1B1F24"/>
-                </a:solidFill>
-                <a:latin typeface="Inter" pitchFamily="34" charset="0"/>
-                <a:ea typeface="Inter" pitchFamily="34" charset="-122"/>
-                <a:cs typeface="Inter" pitchFamily="34" charset="-120"/>
-              </a:rPr>
-              <a:t>Her tone kit: 'warmer, shorter, plainer,' the read-aloud test, the 24-hour rule.</a:t>
+                  <a:srgbClr val="C9D4DE"/>
+                </a:solidFill>
+                <a:latin typeface="Inter" pitchFamily="34" charset="0"/>
+                <a:ea typeface="Inter" pitchFamily="34" charset="-122"/>
+                <a:cs typeface="Inter" pitchFamily="34" charset="-120"/>
+              </a:rPr>
+              <a:t>Her red line: she writes it plain; she doesn't ship what she can't read.</a:t>
             </a:r>
             <a:endParaRPr lang="en-US" sz="1000" dirty="0"/>
           </a:p>
@@ -8261,24 +8277,125 @@
         </p:nvSpPr>
         <p:spPr>
           <a:xfrm>
-            <a:off x="566928" y="128016"/>
-            <a:ext cx="11055096" cy="274320"/>
-          </a:xfrm>
-          <a:prstGeom prst="rect">
-            <a:avLst/>
-          </a:prstGeom>
-          <a:noFill/>
-          <a:ln/>
-        </p:spPr>
-        <p:txBody>
-          <a:bodyPr wrap="square" lIns="0" tIns="0" rIns="0" bIns="0" rtlCol="0" anchor="ctr"/>
-          <a:lstStyle/>
-          <a:p>
-            <a:pPr indent="0" marL="0">
-              <a:buNone/>
-            </a:pPr>
-            <a:r>
-              <a:rPr lang="en-US" sz="1200" b="1" spc="200" kern="0" dirty="0">
+            <a:off x="822960" y="1051560"/>
+            <a:ext cx="10515600" cy="457200"/>
+          </a:xfrm>
+          <a:prstGeom prst="rect">
+            <a:avLst/>
+          </a:prstGeom>
+          <a:noFill/>
+          <a:ln/>
+        </p:spPr>
+        <p:txBody>
+          <a:bodyPr wrap="square" lIns="0" tIns="0" rIns="0" bIns="0" rtlCol="0" anchor="ctr"/>
+          <a:lstStyle/>
+          <a:p>
+            <a:pPr indent="0" marL="0">
+              <a:buNone/>
+            </a:pPr>
+            <a:r>
+              <a:rPr lang="en-US" sz="1500" b="1" spc="300" kern="0" dirty="0">
+                <a:solidFill>
+                  <a:srgbClr val="F4A825"/>
+                </a:solidFill>
+                <a:latin typeface="Inter" pitchFamily="34" charset="0"/>
+                <a:ea typeface="Inter" pitchFamily="34" charset="-122"/>
+                <a:cs typeface="Inter" pitchFamily="34" charset="-120"/>
+              </a:rPr>
+              <a:t>ONE RED LINE, BEFORE THE LAB</a:t>
+            </a:r>
+            <a:endParaRPr lang="en-US" sz="1500" dirty="0"/>
+          </a:p>
+        </p:txBody>
+      </p:sp>
+      <p:sp>
+        <p:nvSpPr>
+          <p:cNvPr id="13" name="Text 10"/>
+          <p:cNvSpPr/>
+          <p:nvPr/>
+        </p:nvSpPr>
+        <p:spPr>
+          <a:xfrm>
+            <a:off x="822960" y="1600200"/>
+            <a:ext cx="10607040" cy="1554480"/>
+          </a:xfrm>
+          <a:prstGeom prst="rect">
+            <a:avLst/>
+          </a:prstGeom>
+          <a:noFill/>
+          <a:ln/>
+        </p:spPr>
+        <p:txBody>
+          <a:bodyPr wrap="square" lIns="0" tIns="0" rIns="0" bIns="0" rtlCol="0" anchor="ctr"/>
+          <a:lstStyle/>
+          <a:p>
+            <a:pPr indent="0" marL="0">
+              <a:lnSpc>
+                <a:spcPct val="115000"/>
+              </a:lnSpc>
+              <a:buNone/>
+            </a:pPr>
+            <a:r>
+              <a:rPr lang="en-US" sz="3300" b="1" dirty="0">
+                <a:solidFill>
+                  <a:srgbClr val="FFFFFF"/>
+                </a:solidFill>
+                <a:latin typeface="Inter" pitchFamily="34" charset="0"/>
+                <a:ea typeface="Inter" pitchFamily="34" charset="-122"/>
+                <a:cs typeface="Inter" pitchFamily="34" charset="-120"/>
+              </a:rPr>
+              <a:t>No public AI translation of family messages.</a:t>
+            </a:r>
+            <a:endParaRPr lang="en-US" sz="3300" dirty="0"/>
+          </a:p>
+          <a:p>
+            <a:pPr indent="0" marL="0">
+              <a:lnSpc>
+                <a:spcPct val="115000"/>
+              </a:lnSpc>
+              <a:buNone/>
+            </a:pPr>
+            <a:r>
+              <a:rPr lang="en-US" sz="3300" b="1" dirty="0">
+                <a:solidFill>
+                  <a:srgbClr val="FFFFFF"/>
+                </a:solidFill>
+                <a:latin typeface="Inter" pitchFamily="34" charset="0"/>
+                <a:ea typeface="Inter" pitchFamily="34" charset="-122"/>
+                <a:cs typeface="Inter" pitchFamily="34" charset="-120"/>
+              </a:rPr>
+              <a:t>You cannot review what you cannot read.</a:t>
+            </a:r>
+            <a:endParaRPr lang="en-US" sz="3300" dirty="0"/>
+          </a:p>
+        </p:txBody>
+      </p:sp>
+      <p:sp>
+        <p:nvSpPr>
+          <p:cNvPr id="14" name="Text 11"/>
+          <p:cNvSpPr/>
+          <p:nvPr/>
+        </p:nvSpPr>
+        <p:spPr>
+          <a:xfrm>
+            <a:off x="868680" y="3520440"/>
+            <a:ext cx="10424160" cy="914400"/>
+          </a:xfrm>
+          <a:prstGeom prst="rect">
+            <a:avLst/>
+          </a:prstGeom>
+          <a:noFill/>
+          <a:ln/>
+        </p:spPr>
+        <p:txBody>
+          <a:bodyPr wrap="square" lIns="0" tIns="0" rIns="0" bIns="0" rtlCol="0" anchor="t"/>
+          <a:lstStyle/>
+          <a:p>
+            <a:pPr indent="0" marL="0">
+              <a:buNone/>
+            </a:pPr>
+            <a:r>
+              <a:rPr lang="en-US" sz="1900" b="1" dirty="0">
                 <a:solidFill>
                   <a:srgbClr val="2A9D8F"/>
                 </a:solidFill>
@@ -8286,77 +8403,25 @@
                 <a:ea typeface="Inter" pitchFamily="34" charset="-122"/>
                 <a:cs typeface="Inter" pitchFamily="34" charset="-120"/>
               </a:rPr>
-              <a:t>SMALL ENOUGH TO MEMORIZE</a:t>
-            </a:r>
-            <a:endParaRPr lang="en-US" sz="1200" dirty="0"/>
-          </a:p>
-        </p:txBody>
-      </p:sp>
-      <p:sp>
-        <p:nvSpPr>
-          <p:cNvPr id="13" name="Text 10"/>
-          <p:cNvSpPr/>
-          <p:nvPr/>
-        </p:nvSpPr>
-        <p:spPr>
-          <a:xfrm>
-            <a:off x="548640" y="384048"/>
-            <a:ext cx="11091672" cy="777240"/>
-          </a:xfrm>
-          <a:prstGeom prst="rect">
-            <a:avLst/>
-          </a:prstGeom>
-          <a:noFill/>
-          <a:ln/>
-        </p:spPr>
-        <p:txBody>
-          <a:bodyPr wrap="square" lIns="0" tIns="0" rIns="0" bIns="0" rtlCol="0" anchor="ctr"/>
-          <a:lstStyle/>
-          <a:p>
-            <a:pPr indent="0" marL="0">
-              <a:buNone/>
-            </a:pPr>
-            <a:r>
-              <a:rPr lang="en-US" sz="3200" b="1" dirty="0">
-                <a:solidFill>
-                  <a:srgbClr val="13293D"/>
-                </a:solidFill>
-                <a:latin typeface="Inter" pitchFamily="34" charset="0"/>
-                <a:ea typeface="Inter" pitchFamily="34" charset="-122"/>
-                <a:cs typeface="Inter" pitchFamily="34" charset="-120"/>
-              </a:rPr>
-              <a:t>The tone-repair kit</a:t>
-            </a:r>
-            <a:endParaRPr lang="en-US" sz="3200" dirty="0"/>
-          </a:p>
-        </p:txBody>
-      </p:sp>
-      <p:sp>
-        <p:nvSpPr>
-          <p:cNvPr id="14" name="Shape 11"/>
-          <p:cNvSpPr/>
-          <p:nvPr/>
-        </p:nvSpPr>
-        <p:spPr>
-          <a:xfrm>
-            <a:off x="640080" y="1554480"/>
-            <a:ext cx="3520440" cy="3108960"/>
-          </a:xfrm>
-          <a:prstGeom prst="roundRect">
-            <a:avLst>
-              <a:gd name="adj" fmla="val 2647"/>
-            </a:avLst>
-          </a:prstGeom>
-          <a:solidFill>
-            <a:srgbClr val="F7F5F0"/>
-          </a:solidFill>
-          <a:ln w="12700">
-            <a:solidFill>
-              <a:srgbClr val="F7F5F0"/>
-            </a:solidFill>
-            <a:prstDash val="solid"/>
-          </a:ln>
-        </p:spPr>
+              <a:t>Official and legal documents </a:t>
+            </a:r>
+            <a:pPr indent="0" marL="0">
+              <a:buNone/>
+            </a:pPr>
+            <a:r>
+              <a:rPr lang="en-US" sz="1900" dirty="0">
+                <a:solidFill>
+                  <a:srgbClr val="C9D4DE"/>
+                </a:solidFill>
+                <a:latin typeface="Inter" pitchFamily="34" charset="0"/>
+                <a:ea typeface="Inter" pitchFamily="34" charset="-122"/>
+                <a:cs typeface="Inter" pitchFamily="34" charset="-120"/>
+              </a:rPr>
+              <a:t>travel your district's translation channels. That lane exists, and it's the district's obligation.</a:t>
+            </a:r>
+            <a:endParaRPr lang="en-US" sz="1900" dirty="0"/>
+          </a:p>
+        </p:txBody>
       </p:sp>
       <p:sp>
         <p:nvSpPr>
@@ -8366,24 +8431,24 @@
         </p:nvSpPr>
         <p:spPr>
           <a:xfrm>
-            <a:off x="896112" y="1828800"/>
-            <a:ext cx="3017520" cy="457200"/>
-          </a:xfrm>
-          <a:prstGeom prst="rect">
-            <a:avLst/>
-          </a:prstGeom>
-          <a:noFill/>
-          <a:ln/>
-        </p:spPr>
-        <p:txBody>
-          <a:bodyPr wrap="square" lIns="0" tIns="0" rIns="0" bIns="0" rtlCol="0" anchor="ctr"/>
-          <a:lstStyle/>
-          <a:p>
-            <a:pPr indent="0" marL="0">
-              <a:buNone/>
-            </a:pPr>
-            <a:r>
-              <a:rPr lang="en-US" sz="2000" b="1" dirty="0">
+            <a:off x="868680" y="4572000"/>
+            <a:ext cx="10424160" cy="914400"/>
+          </a:xfrm>
+          <a:prstGeom prst="rect">
+            <a:avLst/>
+          </a:prstGeom>
+          <a:noFill/>
+          <a:ln/>
+        </p:spPr>
+        <p:txBody>
+          <a:bodyPr wrap="square" lIns="0" tIns="0" rIns="0" bIns="0" rtlCol="0" anchor="t"/>
+          <a:lstStyle/>
+          <a:p>
+            <a:pPr indent="0" marL="0">
+              <a:buNone/>
+            </a:pPr>
+            <a:r>
+              <a:rPr lang="en-US" sz="1900" b="1" dirty="0">
                 <a:solidFill>
                   <a:srgbClr val="2A9D8F"/>
                 </a:solidFill>
@@ -8391,9 +8456,23 @@
                 <a:ea typeface="Inter" pitchFamily="34" charset="-122"/>
                 <a:cs typeface="Inter" pitchFamily="34" charset="-120"/>
               </a:rPr>
-              <a:t>Three commands</a:t>
-            </a:r>
-            <a:endParaRPr lang="en-US" sz="2000" dirty="0"/>
+              <a:t>Your job is the original: </a:t>
+            </a:r>
+            <a:pPr indent="0" marL="0">
+              <a:buNone/>
+            </a:pPr>
+            <a:r>
+              <a:rPr lang="en-US" sz="1900" dirty="0">
+                <a:solidFill>
+                  <a:srgbClr val="C9D4DE"/>
+                </a:solidFill>
+                <a:latin typeface="Inter" pitchFamily="34" charset="0"/>
+                <a:ea typeface="Inter" pitchFamily="34" charset="-122"/>
+                <a:cs typeface="Inter" pitchFamily="34" charset="-120"/>
+              </a:rPr>
+              <a:t>plain language, short sentences, no idioms. That's the version every family can use, including multilingual families.</a:t>
+            </a:r>
+            <a:endParaRPr lang="en-US" sz="1900" dirty="0"/>
           </a:p>
         </p:txBody>
       </p:sp>
@@ -8405,90 +8484,24 @@
         </p:nvSpPr>
         <p:spPr>
           <a:xfrm>
-            <a:off x="896112" y="2377440"/>
-            <a:ext cx="3017520" cy="2103120"/>
-          </a:xfrm>
-          <a:prstGeom prst="rect">
-            <a:avLst/>
-          </a:prstGeom>
-          <a:noFill/>
-          <a:ln/>
-        </p:spPr>
-        <p:txBody>
-          <a:bodyPr wrap="square" lIns="0" tIns="0" rIns="0" bIns="0" rtlCol="0" anchor="t"/>
-          <a:lstStyle/>
-          <a:p>
-            <a:pPr indent="0" marL="0">
-              <a:buNone/>
-            </a:pPr>
-            <a:r>
-              <a:rPr lang="en-US" sz="1600" dirty="0">
-                <a:solidFill>
-                  <a:srgbClr val="1B1F24"/>
-                </a:solidFill>
-                <a:latin typeface="Inter" pitchFamily="34" charset="0"/>
-                <a:ea typeface="Inter" pitchFamily="34" charset="-122"/>
-                <a:cs typeface="Inter" pitchFamily="34" charset="-120"/>
-              </a:rPr>
-              <a:t>"Warmer." "Shorter." "Plainer." Ninety percent of drafts need exactly one.</a:t>
-            </a:r>
-            <a:endParaRPr lang="en-US" sz="1600" dirty="0"/>
-          </a:p>
-        </p:txBody>
-      </p:sp>
-      <p:sp>
-        <p:nvSpPr>
-          <p:cNvPr id="17" name="Shape 14"/>
-          <p:cNvSpPr/>
-          <p:nvPr/>
-        </p:nvSpPr>
-        <p:spPr>
-          <a:xfrm>
-            <a:off x="4407408" y="1554480"/>
-            <a:ext cx="3520440" cy="3108960"/>
-          </a:xfrm>
-          <a:prstGeom prst="roundRect">
-            <a:avLst>
-              <a:gd name="adj" fmla="val 2647"/>
-            </a:avLst>
-          </a:prstGeom>
-          <a:solidFill>
-            <a:srgbClr val="F7F5F0"/>
-          </a:solidFill>
-          <a:ln w="12700">
-            <a:solidFill>
-              <a:srgbClr val="F7F5F0"/>
-            </a:solidFill>
-            <a:prstDash val="solid"/>
-          </a:ln>
-        </p:spPr>
-      </p:sp>
-      <p:sp>
-        <p:nvSpPr>
-          <p:cNvPr id="18" name="Text 15"/>
-          <p:cNvSpPr/>
-          <p:nvPr/>
-        </p:nvSpPr>
-        <p:spPr>
-          <a:xfrm>
-            <a:off x="4663440" y="1828800"/>
-            <a:ext cx="3017520" cy="457200"/>
-          </a:xfrm>
-          <a:prstGeom prst="rect">
-            <a:avLst/>
-          </a:prstGeom>
-          <a:noFill/>
-          <a:ln/>
-        </p:spPr>
-        <p:txBody>
-          <a:bodyPr wrap="square" lIns="0" tIns="0" rIns="0" bIns="0" rtlCol="0" anchor="ctr"/>
-          <a:lstStyle/>
-          <a:p>
-            <a:pPr indent="0" marL="0">
-              <a:buNone/>
-            </a:pPr>
-            <a:r>
-              <a:rPr lang="en-US" sz="2000" b="1" dirty="0">
+            <a:off x="822960" y="5715000"/>
+            <a:ext cx="10515600" cy="457200"/>
+          </a:xfrm>
+          <a:prstGeom prst="rect">
+            <a:avLst/>
+          </a:prstGeom>
+          <a:noFill/>
+          <a:ln/>
+        </p:spPr>
+        <p:txBody>
+          <a:bodyPr wrap="square" lIns="0" tIns="0" rIns="0" bIns="0" rtlCol="0" anchor="ctr"/>
+          <a:lstStyle/>
+          <a:p>
+            <a:pPr indent="0" marL="0">
+              <a:buNone/>
+            </a:pPr>
+            <a:r>
+              <a:rPr lang="en-US" sz="1800" i="1" dirty="0">
                 <a:solidFill>
                   <a:srgbClr val="2A9D8F"/>
                 </a:solidFill>
@@ -8496,192 +8509,9 @@
                 <a:ea typeface="Inter" pitchFamily="34" charset="-122"/>
                 <a:cs typeface="Inter" pitchFamily="34" charset="-120"/>
               </a:rPr>
-              <a:t>One test</a:t>
-            </a:r>
-            <a:endParaRPr lang="en-US" sz="2000" dirty="0"/>
-          </a:p>
-        </p:txBody>
-      </p:sp>
-      <p:sp>
-        <p:nvSpPr>
-          <p:cNvPr id="19" name="Text 16"/>
-          <p:cNvSpPr/>
-          <p:nvPr/>
-        </p:nvSpPr>
-        <p:spPr>
-          <a:xfrm>
-            <a:off x="4663440" y="2377440"/>
-            <a:ext cx="3017520" cy="2103120"/>
-          </a:xfrm>
-          <a:prstGeom prst="rect">
-            <a:avLst/>
-          </a:prstGeom>
-          <a:noFill/>
-          <a:ln/>
-        </p:spPr>
-        <p:txBody>
-          <a:bodyPr wrap="square" lIns="0" tIns="0" rIns="0" bIns="0" rtlCol="0" anchor="t"/>
-          <a:lstStyle/>
-          <a:p>
-            <a:pPr indent="0" marL="0">
-              <a:buNone/>
-            </a:pPr>
-            <a:r>
-              <a:rPr lang="en-US" sz="1600" dirty="0">
-                <a:solidFill>
-                  <a:srgbClr val="1B1F24"/>
-                </a:solidFill>
-                <a:latin typeface="Inter" pitchFamily="34" charset="0"/>
-                <a:ea typeface="Inter" pitchFamily="34" charset="-122"/>
-                <a:cs typeface="Inter" pitchFamily="34" charset="-120"/>
-              </a:rPr>
-              <a:t>Read it aloud. Your ear knows your voice better than your eyes do.</a:t>
-            </a:r>
-            <a:endParaRPr lang="en-US" sz="1600" dirty="0"/>
-          </a:p>
-        </p:txBody>
-      </p:sp>
-      <p:sp>
-        <p:nvSpPr>
-          <p:cNvPr id="20" name="Shape 17"/>
-          <p:cNvSpPr/>
-          <p:nvPr/>
-        </p:nvSpPr>
-        <p:spPr>
-          <a:xfrm>
-            <a:off x="8174736" y="1554480"/>
-            <a:ext cx="3520440" cy="3108960"/>
-          </a:xfrm>
-          <a:prstGeom prst="roundRect">
-            <a:avLst>
-              <a:gd name="adj" fmla="val 2647"/>
-            </a:avLst>
-          </a:prstGeom>
-          <a:solidFill>
-            <a:srgbClr val="F7F5F0"/>
-          </a:solidFill>
-          <a:ln w="12700">
-            <a:solidFill>
-              <a:srgbClr val="F7F5F0"/>
-            </a:solidFill>
-            <a:prstDash val="solid"/>
-          </a:ln>
-        </p:spPr>
-      </p:sp>
-      <p:sp>
-        <p:nvSpPr>
-          <p:cNvPr id="21" name="Text 18"/>
-          <p:cNvSpPr/>
-          <p:nvPr/>
-        </p:nvSpPr>
-        <p:spPr>
-          <a:xfrm>
-            <a:off x="8430768" y="1828800"/>
-            <a:ext cx="3017520" cy="457200"/>
-          </a:xfrm>
-          <a:prstGeom prst="rect">
-            <a:avLst/>
-          </a:prstGeom>
-          <a:noFill/>
-          <a:ln/>
-        </p:spPr>
-        <p:txBody>
-          <a:bodyPr wrap="square" lIns="0" tIns="0" rIns="0" bIns="0" rtlCol="0" anchor="ctr"/>
-          <a:lstStyle/>
-          <a:p>
-            <a:pPr indent="0" marL="0">
-              <a:buNone/>
-            </a:pPr>
-            <a:r>
-              <a:rPr lang="en-US" sz="2000" b="1" dirty="0">
-                <a:solidFill>
-                  <a:srgbClr val="2A9D8F"/>
-                </a:solidFill>
-                <a:latin typeface="Inter" pitchFamily="34" charset="0"/>
-                <a:ea typeface="Inter" pitchFamily="34" charset="-122"/>
-                <a:cs typeface="Inter" pitchFamily="34" charset="-120"/>
-              </a:rPr>
-              <a:t>One rule</a:t>
-            </a:r>
-            <a:endParaRPr lang="en-US" sz="2000" dirty="0"/>
-          </a:p>
-        </p:txBody>
-      </p:sp>
-      <p:sp>
-        <p:nvSpPr>
-          <p:cNvPr id="22" name="Text 19"/>
-          <p:cNvSpPr/>
-          <p:nvPr/>
-        </p:nvSpPr>
-        <p:spPr>
-          <a:xfrm>
-            <a:off x="8430768" y="2377440"/>
-            <a:ext cx="3017520" cy="2103120"/>
-          </a:xfrm>
-          <a:prstGeom prst="rect">
-            <a:avLst/>
-          </a:prstGeom>
-          <a:noFill/>
-          <a:ln/>
-        </p:spPr>
-        <p:txBody>
-          <a:bodyPr wrap="square" lIns="0" tIns="0" rIns="0" bIns="0" rtlCol="0" anchor="t"/>
-          <a:lstStyle/>
-          <a:p>
-            <a:pPr indent="0" marL="0">
-              <a:buNone/>
-            </a:pPr>
-            <a:r>
-              <a:rPr lang="en-US" sz="1600" dirty="0">
-                <a:solidFill>
-                  <a:srgbClr val="1B1F24"/>
-                </a:solidFill>
-                <a:latin typeface="Inter" pitchFamily="34" charset="0"/>
-                <a:ea typeface="Inter" pitchFamily="34" charset="-122"/>
-                <a:cs typeface="Inter" pitchFamily="34" charset="-120"/>
-              </a:rPr>
-              <a:t>The 24-hour rule: written angry waits a day, unless safety can't wait.</a:t>
-            </a:r>
-            <a:endParaRPr lang="en-US" sz="1600" dirty="0"/>
-          </a:p>
-        </p:txBody>
-      </p:sp>
-      <p:sp>
-        <p:nvSpPr>
-          <p:cNvPr id="23" name="Text 20"/>
-          <p:cNvSpPr/>
-          <p:nvPr/>
-        </p:nvSpPr>
-        <p:spPr>
-          <a:xfrm>
-            <a:off x="640080" y="4937760"/>
-            <a:ext cx="10972800" cy="457200"/>
-          </a:xfrm>
-          <a:prstGeom prst="rect">
-            <a:avLst/>
-          </a:prstGeom>
-          <a:noFill/>
-          <a:ln/>
-        </p:spPr>
-        <p:txBody>
-          <a:bodyPr wrap="square" lIns="0" tIns="0" rIns="0" bIns="0" rtlCol="0" anchor="ctr"/>
-          <a:lstStyle/>
-          <a:p>
-            <a:pPr algn="ctr" indent="0" marL="0">
-              <a:buNone/>
-            </a:pPr>
-            <a:r>
-              <a:rPr lang="en-US" sz="1900" b="1" dirty="0">
-                <a:solidFill>
-                  <a:srgbClr val="13293D"/>
-                </a:solidFill>
-                <a:latin typeface="Inter" pitchFamily="34" charset="0"/>
-                <a:ea typeface="Inter" pitchFamily="34" charset="-122"/>
-                <a:cs typeface="Inter" pitchFamily="34" charset="-120"/>
-              </a:rPr>
-              <a:t>It fits on the handout's back pocket, and it saves a hundred small regrets a year.</a:t>
-            </a:r>
-            <a:endParaRPr lang="en-US" sz="1900" dirty="0"/>
+              <a:t>Write it plain; don't ship what you can't read.</a:t>
+            </a:r>
+            <a:endParaRPr lang="en-US" sz="1800" dirty="0"/>
           </a:p>
         </p:txBody>
       </p:sp>
@@ -9938,7 +9768,7 @@
                 <a:ea typeface="Inter" pitchFamily="34" charset="-122"/>
                 <a:cs typeface="Inter" pitchFamily="34" charset="-120"/>
               </a:rPr>
-              <a:t>Reviewed, personal, on-time messages in a language the family reads: deposits. Late, generic, robotic ones: withdrawals. AI just made deposits cheap.</a:t>
+              <a:t>Reviewed, personal, on-time messages, written plainly enough for every family to use: deposits. Late, generic, robotic ones: withdrawals. AI just made deposits cheap.</a:t>
             </a:r>
             <a:endParaRPr lang="en-US" sz="2100" dirty="0"/>
           </a:p>
@@ -10293,7 +10123,7 @@
                 <a:ea typeface="Inter" pitchFamily="34" charset="-122"/>
                 <a:cs typeface="Inter" pitchFamily="34" charset="-120"/>
               </a:rPr>
-              <a:t>Her lab plan: one real message, one note batch, one translation plan.</a:t>
+              <a:t>Her lab plan: the Friday newsletter, from blank page to scheduled send.</a:t>
             </a:r>
             <a:endParaRPr lang="en-US" sz="1000" dirty="0"/>
           </a:p>
@@ -10332,7 +10162,7 @@
                 <a:ea typeface="Inter" pitchFamily="34" charset="-122"/>
                 <a:cs typeface="Inter" pitchFamily="34" charset="-120"/>
               </a:rPr>
-              <a:t>HANDS-ON · ~21 MINUTES</a:t>
+              <a:t>HANDS-ON · ~18 MINUTES + SHARE-OUT</a:t>
             </a:r>
             <a:endParaRPr lang="en-US" sz="1300" dirty="0"/>
           </a:p>
@@ -10371,7 +10201,7 @@
                 <a:ea typeface="Inter" pitchFamily="34" charset="-122"/>
                 <a:cs typeface="Inter" pitchFamily="34" charset="-120"/>
               </a:rPr>
-              <a:t>Lab: real messages, really sent.</a:t>
+              <a:t>Lab: one message, start to send.</a:t>
             </a:r>
             <a:endParaRPr lang="en-US" sz="4200" dirty="0"/>
           </a:p>
@@ -10410,7 +10240,7 @@
                 <a:ea typeface="Inter" pitchFamily="34" charset="-122"/>
                 <a:cs typeface="Inter" pitchFamily="34" charset="-120"/>
               </a:rPr>
-              <a:t>The message you owe families this week, your first note batch, and a translation plan for your actual roster.</a:t>
+              <a:t>The one real message you owe families this week, taken from blank page to scheduled send. Ms. Rivera does hers on screen: her Friday newsletter, evolving at every step.</a:t>
             </a:r>
             <a:endParaRPr lang="en-US" sz="2000" dirty="0"/>
           </a:p>
@@ -10719,7 +10549,7 @@
                 <a:ea typeface="Inter" pitchFamily="34" charset="-122"/>
                 <a:cs typeface="Inter" pitchFamily="34" charset="-120"/>
               </a:rPr>
-              <a:t>Three deliverables: the message, the batch, the access plan</a:t>
+              <a:t>One deliverable: a message that actually sends this week</a:t>
             </a:r>
             <a:endParaRPr lang="en-US" sz="2100" dirty="0"/>
           </a:p>
@@ -11074,7 +10904,7 @@
                 <a:ea typeface="Inter" pitchFamily="34" charset="-122"/>
                 <a:cs typeface="Inter" pitchFamily="34" charset="-120"/>
               </a:rPr>
-              <a:t>On her screen: next week's message, drafted with all four parts.</a:t>
+              <a:t>Her newsletter, v1: all four parts in. Beige, and the slip is at the bottom.</a:t>
             </a:r>
             <a:endParaRPr lang="en-US" sz="1000" dirty="0"/>
           </a:p>
@@ -11128,7 +10958,7 @@
         <p:spPr>
           <a:xfrm>
             <a:off x="548640" y="384048"/>
-            <a:ext cx="11091672" cy="777240"/>
+            <a:ext cx="7955280" cy="777240"/>
           </a:xfrm>
           <a:prstGeom prst="rect">
             <a:avLst/>
@@ -11166,8 +10996,8 @@
         </p:nvSpPr>
         <p:spPr>
           <a:xfrm>
-            <a:off x="640080" y="1371600"/>
-            <a:ext cx="10908792" cy="4297680"/>
+            <a:off x="640080" y="1417320"/>
+            <a:ext cx="4114800" cy="4206240"/>
           </a:xfrm>
           <a:prstGeom prst="rect">
             <a:avLst/>
@@ -11187,7 +11017,7 @@
               <a:buChar char="•"/>
             </a:pPr>
             <a:r>
-              <a:rPr lang="en-US" sz="2100" dirty="0">
+              <a:rPr lang="en-US" sz="1700" dirty="0">
                 <a:solidFill>
                   <a:srgbClr val="1B1F24"/>
                 </a:solidFill>
@@ -11197,7 +11027,7 @@
               </a:rPr>
               <a:t>The message you actually owe families: newsletter, unit update, event reminder</a:t>
             </a:r>
-            <a:endParaRPr lang="en-US" sz="2100" dirty="0"/>
+            <a:endParaRPr lang="en-US" sz="1700" dirty="0"/>
           </a:p>
           <a:p>
             <a:pPr marL="342900" indent="-342900">
@@ -11208,7 +11038,7 @@
               <a:buChar char="•"/>
             </a:pPr>
             <a:r>
-              <a:rPr lang="en-US" sz="2100" dirty="0">
+              <a:rPr lang="en-US" sz="1700" dirty="0">
                 <a:solidFill>
                   <a:srgbClr val="1B1F24"/>
                 </a:solidFill>
@@ -11218,18 +11048,15 @@
               </a:rPr>
               <a:t>All four parts; be generous with context: what happened, what's coming, what to do and by when</a:t>
             </a:r>
-            <a:endParaRPr lang="en-US" sz="2100" dirty="0"/>
+            <a:endParaRPr lang="en-US" sz="1700" dirty="0"/>
           </a:p>
           <a:p>
             <a:pPr marL="342900" indent="-342900">
-              <a:spcAft>
-                <a:spcPts val="1000"/>
-              </a:spcAft>
               <a:buSzPct val="100000"/>
               <a:buChar char="•"/>
             </a:pPr>
             <a:r>
-              <a:rPr lang="en-US" sz="2100" dirty="0">
+              <a:rPr lang="en-US" sz="1700" b="1" dirty="0">
                 <a:solidFill>
                   <a:srgbClr val="1B1F24"/>
                 </a:solidFill>
@@ -11237,20 +11064,209 @@
                 <a:ea typeface="Inter" pitchFamily="34" charset="-122"/>
                 <a:cs typeface="Inter" pitchFamily="34" charset="-120"/>
               </a:rPr>
-              <a:t>Mimic the shape on Ms. Rivera's screen from slide 9</a:t>
-            </a:r>
-            <a:endParaRPr lang="en-US" sz="2100" dirty="0"/>
-          </a:p>
-          <a:p>
-            <a:pPr marL="342900" indent="-342900">
-              <a:spcAft>
-                <a:spcPts val="1000"/>
-              </a:spcAft>
-              <a:buSzPct val="100000"/>
-              <a:buChar char="•"/>
-            </a:pPr>
-            <a:r>
-              <a:rPr lang="en-US" sz="2100" b="1" dirty="0">
+              <a:t>A beige first draft is normal. The next three steps make it yours.</a:t>
+            </a:r>
+            <a:endParaRPr lang="en-US" sz="1700" dirty="0"/>
+          </a:p>
+        </p:txBody>
+      </p:sp>
+      <p:sp>
+        <p:nvSpPr>
+          <p:cNvPr id="15" name="Shape 12"/>
+          <p:cNvSpPr/>
+          <p:nvPr/>
+        </p:nvSpPr>
+        <p:spPr>
+          <a:xfrm>
+            <a:off x="4983480" y="1417320"/>
+            <a:ext cx="6629400" cy="4434840"/>
+          </a:xfrm>
+          <a:prstGeom prst="roundRect">
+            <a:avLst>
+              <a:gd name="adj" fmla="val 2062"/>
+            </a:avLst>
+          </a:prstGeom>
+          <a:solidFill>
+            <a:srgbClr val="FFFFFF"/>
+          </a:solidFill>
+          <a:ln w="19050">
+            <a:solidFill>
+              <a:srgbClr val="DCE3EA"/>
+            </a:solidFill>
+            <a:prstDash val="solid"/>
+          </a:ln>
+        </p:spPr>
+      </p:sp>
+      <p:sp>
+        <p:nvSpPr>
+          <p:cNvPr id="16" name="Shape 13"/>
+          <p:cNvSpPr/>
+          <p:nvPr/>
+        </p:nvSpPr>
+        <p:spPr>
+          <a:xfrm>
+            <a:off x="4983480" y="1417320"/>
+            <a:ext cx="6629400" cy="384048"/>
+          </a:xfrm>
+          <a:prstGeom prst="roundRect">
+            <a:avLst>
+              <a:gd name="adj" fmla="val 23810"/>
+            </a:avLst>
+          </a:prstGeom>
+          <a:solidFill>
+            <a:srgbClr val="13293D"/>
+          </a:solidFill>
+          <a:ln w="12700">
+            <a:solidFill>
+              <a:srgbClr val="13293D"/>
+            </a:solidFill>
+            <a:prstDash val="solid"/>
+          </a:ln>
+        </p:spPr>
+      </p:sp>
+      <p:sp>
+        <p:nvSpPr>
+          <p:cNvPr id="17" name="Shape 14"/>
+          <p:cNvSpPr/>
+          <p:nvPr/>
+        </p:nvSpPr>
+        <p:spPr>
+          <a:xfrm>
+            <a:off x="5184648" y="1536192"/>
+            <a:ext cx="146304" cy="146304"/>
+          </a:xfrm>
+          <a:prstGeom prst="ellipse">
+            <a:avLst/>
+          </a:prstGeom>
+          <a:solidFill>
+            <a:srgbClr val="E8837A"/>
+          </a:solidFill>
+          <a:ln w="12700">
+            <a:solidFill>
+              <a:srgbClr val="E8837A"/>
+            </a:solidFill>
+            <a:prstDash val="solid"/>
+          </a:ln>
+        </p:spPr>
+      </p:sp>
+      <p:sp>
+        <p:nvSpPr>
+          <p:cNvPr id="18" name="Shape 15"/>
+          <p:cNvSpPr/>
+          <p:nvPr/>
+        </p:nvSpPr>
+        <p:spPr>
+          <a:xfrm>
+            <a:off x="5431536" y="1536192"/>
+            <a:ext cx="146304" cy="146304"/>
+          </a:xfrm>
+          <a:prstGeom prst="ellipse">
+            <a:avLst/>
+          </a:prstGeom>
+          <a:solidFill>
+            <a:srgbClr val="F4A825"/>
+          </a:solidFill>
+          <a:ln w="12700">
+            <a:solidFill>
+              <a:srgbClr val="F4A825"/>
+            </a:solidFill>
+            <a:prstDash val="solid"/>
+          </a:ln>
+        </p:spPr>
+      </p:sp>
+      <p:sp>
+        <p:nvSpPr>
+          <p:cNvPr id="19" name="Shape 16"/>
+          <p:cNvSpPr/>
+          <p:nvPr/>
+        </p:nvSpPr>
+        <p:spPr>
+          <a:xfrm>
+            <a:off x="5678424" y="1536192"/>
+            <a:ext cx="146304" cy="146304"/>
+          </a:xfrm>
+          <a:prstGeom prst="ellipse">
+            <a:avLst/>
+          </a:prstGeom>
+          <a:solidFill>
+            <a:srgbClr val="2E7D5B"/>
+          </a:solidFill>
+          <a:ln w="12700">
+            <a:solidFill>
+              <a:srgbClr val="2E7D5B"/>
+            </a:solidFill>
+            <a:prstDash val="solid"/>
+          </a:ln>
+        </p:spPr>
+      </p:sp>
+      <p:sp>
+        <p:nvSpPr>
+          <p:cNvPr id="20" name="Text 17"/>
+          <p:cNvSpPr/>
+          <p:nvPr/>
+        </p:nvSpPr>
+        <p:spPr>
+          <a:xfrm>
+            <a:off x="6035040" y="1417320"/>
+            <a:ext cx="5440680" cy="384048"/>
+          </a:xfrm>
+          <a:prstGeom prst="rect">
+            <a:avLst/>
+          </a:prstGeom>
+          <a:noFill/>
+          <a:ln/>
+        </p:spPr>
+        <p:txBody>
+          <a:bodyPr wrap="square" lIns="0" tIns="0" rIns="0" bIns="0" rtlCol="0" anchor="ctr"/>
+          <a:lstStyle/>
+          <a:p>
+            <a:pPr indent="0" marL="0">
+              <a:buNone/>
+            </a:pPr>
+            <a:r>
+              <a:rPr lang="en-US" sz="1100" dirty="0">
+                <a:solidFill>
+                  <a:srgbClr val="9FB2C2"/>
+                </a:solidFill>
+                <a:latin typeface="Inter" pitchFamily="34" charset="0"/>
+                <a:ea typeface="Inter" pitchFamily="34" charset="-122"/>
+                <a:cs typeface="Inter" pitchFamily="34" charset="-120"/>
+              </a:rPr>
+              <a:t>Ms. Rivera's Friday newsletter · v1, straight from the slide 9 prompt</a:t>
+            </a:r>
+            <a:endParaRPr lang="en-US" sz="1100" dirty="0"/>
+          </a:p>
+        </p:txBody>
+      </p:sp>
+      <p:sp>
+        <p:nvSpPr>
+          <p:cNvPr id="21" name="Text 18"/>
+          <p:cNvSpPr/>
+          <p:nvPr/>
+        </p:nvSpPr>
+        <p:spPr>
+          <a:xfrm>
+            <a:off x="5303520" y="2011680"/>
+            <a:ext cx="5989320" cy="2743200"/>
+          </a:xfrm>
+          <a:prstGeom prst="rect">
+            <a:avLst/>
+          </a:prstGeom>
+          <a:noFill/>
+          <a:ln/>
+        </p:spPr>
+        <p:txBody>
+          <a:bodyPr wrap="square" lIns="0" tIns="0" rIns="0" bIns="0" rtlCol="0" anchor="t"/>
+          <a:lstStyle/>
+          <a:p>
+            <a:pPr indent="0" marL="0">
+              <a:lnSpc>
+                <a:spcPct val="115000"/>
+              </a:lnSpc>
+              <a:buNone/>
+            </a:pPr>
+            <a:r>
+              <a:rPr lang="en-US" sz="1600" dirty="0">
                 <a:solidFill>
                   <a:srgbClr val="1B1F24"/>
                 </a:solidFill>
@@ -11258,9 +11274,48 @@
                 <a:ea typeface="Inter" pitchFamily="34" charset="-122"/>
                 <a:cs typeface="Inter" pitchFamily="34" charset="-120"/>
               </a:rPr>
-              <a:t>Then read it as a tired parent on a phone at 9 p.m., because that's who's reading it.</a:t>
-            </a:r>
-            <a:endParaRPr lang="en-US" sz="2100" dirty="0"/>
+              <a:t>"Hello families! We had a wonderful week concluding our fractions unit. The students demonstrated excellent growth. The science fair will take place on Thursday at 6:00 p.m. in the gymnasium, and picture day is Friday. Please be advised that the blue permission slip is due Wednesday. Thank you for your continued support!"</a:t>
+            </a:r>
+            <a:endParaRPr lang="en-US" sz="1600" dirty="0"/>
+          </a:p>
+        </p:txBody>
+      </p:sp>
+      <p:sp>
+        <p:nvSpPr>
+          <p:cNvPr id="22" name="Text 19"/>
+          <p:cNvSpPr/>
+          <p:nvPr/>
+        </p:nvSpPr>
+        <p:spPr>
+          <a:xfrm>
+            <a:off x="5303520" y="5029200"/>
+            <a:ext cx="5989320" cy="685800"/>
+          </a:xfrm>
+          <a:prstGeom prst="rect">
+            <a:avLst/>
+          </a:prstGeom>
+          <a:noFill/>
+          <a:ln/>
+        </p:spPr>
+        <p:txBody>
+          <a:bodyPr wrap="square" lIns="0" tIns="0" rIns="0" bIns="0" rtlCol="0" anchor="t"/>
+          <a:lstStyle/>
+          <a:p>
+            <a:pPr indent="0" marL="0">
+              <a:buNone/>
+            </a:pPr>
+            <a:r>
+              <a:rPr lang="en-US" sz="1250" i="1" dirty="0">
+                <a:solidFill>
+                  <a:srgbClr val="5B6B7A"/>
+                </a:solidFill>
+                <a:latin typeface="Inter" pitchFamily="34" charset="0"/>
+                <a:ea typeface="Inter" pitchFamily="34" charset="-122"/>
+                <a:cs typeface="Inter" pitchFamily="34" charset="-120"/>
+              </a:rPr>
+              <a:t>Close, but not her yet ("demonstrated excellent growth"), and the slip is the last line.</a:t>
+            </a:r>
+            <a:endParaRPr lang="en-US" sz="1250" dirty="0"/>
           </a:p>
         </p:txBody>
       </p:sp>
@@ -12373,7 +12428,7 @@
                 <a:ea typeface="Inter" pitchFamily="34" charset="-122"/>
                 <a:cs typeface="Inter" pitchFamily="34" charset="-120"/>
               </a:rPr>
-              <a:t>Her passes: tone (sounds like her) and reading level (skimmable on a phone).</a:t>
+              <a:t>Her newsletter, v2: it sounds like her now. The slip is still buried.</a:t>
             </a:r>
             <a:endParaRPr lang="en-US" sz="1000" dirty="0"/>
           </a:p>
@@ -12412,7 +12467,7 @@
                 <a:ea typeface="Inter" pitchFamily="34" charset="-122"/>
                 <a:cs typeface="Inter" pitchFamily="34" charset="-120"/>
               </a:rPr>
-              <a:t>LAB · STEP 2 OF 4 · 5 MINUTES</a:t>
+              <a:t>LAB · STEP 2 OF 4 · 4 MINUTES</a:t>
             </a:r>
             <a:endParaRPr lang="en-US" sz="1200" dirty="0"/>
           </a:p>
@@ -12427,7 +12482,7 @@
         <p:spPr>
           <a:xfrm>
             <a:off x="548640" y="384048"/>
-            <a:ext cx="11091672" cy="777240"/>
+            <a:ext cx="7955280" cy="777240"/>
           </a:xfrm>
           <a:prstGeom prst="rect">
             <a:avLst/>
@@ -12451,7 +12506,7 @@
                 <a:ea typeface="Inter" pitchFamily="34" charset="-122"/>
                 <a:cs typeface="Inter" pitchFamily="34" charset="-120"/>
               </a:rPr>
-              <a:t>The two passes</a:t>
+              <a:t>The voice pass</a:t>
             </a:r>
             <a:endParaRPr lang="en-US" sz="3200" dirty="0"/>
           </a:p>
@@ -12459,26 +12514,135 @@
       </p:sp>
       <p:sp>
         <p:nvSpPr>
-          <p:cNvPr id="14" name="Shape 11"/>
-          <p:cNvSpPr/>
-          <p:nvPr/>
-        </p:nvSpPr>
-        <p:spPr>
-          <a:xfrm>
-            <a:off x="640080" y="1554480"/>
-            <a:ext cx="5394960" cy="3840480"/>
+          <p:cNvPr id="14" name="Text 11"/>
+          <p:cNvSpPr/>
+          <p:nvPr/>
+        </p:nvSpPr>
+        <p:spPr>
+          <a:xfrm>
+            <a:off x="640080" y="1417320"/>
+            <a:ext cx="4114800" cy="4206240"/>
+          </a:xfrm>
+          <a:prstGeom prst="rect">
+            <a:avLst/>
+          </a:prstGeom>
+          <a:noFill/>
+          <a:ln/>
+        </p:spPr>
+        <p:txBody>
+          <a:bodyPr wrap="square" rtlCol="0" anchor="t"/>
+          <a:lstStyle/>
+          <a:p>
+            <a:pPr marL="342900" indent="-342900">
+              <a:spcAft>
+                <a:spcPts val="1000"/>
+              </a:spcAft>
+              <a:buSzPct val="100000"/>
+              <a:buChar char="•"/>
+            </a:pPr>
+            <a:r>
+              <a:rPr lang="en-US" sz="1700" dirty="0">
+                <a:solidFill>
+                  <a:srgbClr val="1B1F24"/>
+                </a:solidFill>
+                <a:latin typeface="Inter" pitchFamily="34" charset="0"/>
+                <a:ea typeface="Inter" pitchFamily="34" charset="-122"/>
+                <a:cs typeface="Inter" pitchFamily="34" charset="-120"/>
+              </a:rPr>
+              <a:t>Read your draft ALOUD to your partner</a:t>
+            </a:r>
+            <a:endParaRPr lang="en-US" sz="1700" dirty="0"/>
+          </a:p>
+          <a:p>
+            <a:pPr marL="342900" indent="-342900">
+              <a:spcAft>
+                <a:spcPts val="1000"/>
+              </a:spcAft>
+              <a:buSzPct val="100000"/>
+              <a:buChar char="•"/>
+            </a:pPr>
+            <a:r>
+              <a:rPr lang="en-US" sz="1700" dirty="0">
+                <a:solidFill>
+                  <a:srgbClr val="1B1F24"/>
+                </a:solidFill>
+                <a:latin typeface="Inter" pitchFamily="34" charset="0"/>
+                <a:ea typeface="Inter" pitchFamily="34" charset="-122"/>
+                <a:cs typeface="Inter" pitchFamily="34" charset="-120"/>
+              </a:rPr>
+              <a:t>Every sentence your mouth wouldn't say: retype it the way you'd say it, or ask for warmer, shorter, plainer</a:t>
+            </a:r>
+            <a:endParaRPr lang="en-US" sz="1700" dirty="0"/>
+          </a:p>
+          <a:p>
+            <a:pPr marL="342900" indent="-342900">
+              <a:buSzPct val="100000"/>
+              <a:buChar char="•"/>
+            </a:pPr>
+            <a:r>
+              <a:rPr lang="en-US" sz="1700" b="1" dirty="0">
+                <a:solidFill>
+                  <a:srgbClr val="1B1F24"/>
+                </a:solidFill>
+                <a:latin typeface="Inter" pitchFamily="34" charset="0"/>
+                <a:ea typeface="Inter" pitchFamily="34" charset="-122"/>
+                <a:cs typeface="Inter" pitchFamily="34" charset="-120"/>
+              </a:rPr>
+              <a:t>If it doesn't sound like you, it isn't done.</a:t>
+            </a:r>
+            <a:endParaRPr lang="en-US" sz="1700" dirty="0"/>
+          </a:p>
+        </p:txBody>
+      </p:sp>
+      <p:sp>
+        <p:nvSpPr>
+          <p:cNvPr id="15" name="Shape 12"/>
+          <p:cNvSpPr/>
+          <p:nvPr/>
+        </p:nvSpPr>
+        <p:spPr>
+          <a:xfrm>
+            <a:off x="4983480" y="1417320"/>
+            <a:ext cx="6629400" cy="4434840"/>
           </a:xfrm>
           <a:prstGeom prst="roundRect">
             <a:avLst>
-              <a:gd name="adj" fmla="val 2143"/>
+              <a:gd name="adj" fmla="val 2062"/>
             </a:avLst>
           </a:prstGeom>
           <a:solidFill>
-            <a:srgbClr val="EAF5F3"/>
+            <a:srgbClr val="FFFFFF"/>
+          </a:solidFill>
+          <a:ln w="19050">
+            <a:solidFill>
+              <a:srgbClr val="DCE3EA"/>
+            </a:solidFill>
+            <a:prstDash val="solid"/>
+          </a:ln>
+        </p:spPr>
+      </p:sp>
+      <p:sp>
+        <p:nvSpPr>
+          <p:cNvPr id="16" name="Shape 13"/>
+          <p:cNvSpPr/>
+          <p:nvPr/>
+        </p:nvSpPr>
+        <p:spPr>
+          <a:xfrm>
+            <a:off x="4983480" y="1417320"/>
+            <a:ext cx="6629400" cy="384048"/>
+          </a:xfrm>
+          <a:prstGeom prst="roundRect">
+            <a:avLst>
+              <a:gd name="adj" fmla="val 23810"/>
+            </a:avLst>
+          </a:prstGeom>
+          <a:solidFill>
+            <a:srgbClr val="13293D"/>
           </a:solidFill>
           <a:ln w="12700">
             <a:solidFill>
-              <a:srgbClr val="EAF5F3"/>
+              <a:srgbClr val="13293D"/>
             </a:solidFill>
             <a:prstDash val="solid"/>
           </a:ln>
@@ -12486,104 +12650,24 @@
       </p:sp>
       <p:sp>
         <p:nvSpPr>
-          <p:cNvPr id="15" name="Text 12"/>
-          <p:cNvSpPr/>
-          <p:nvPr/>
-        </p:nvSpPr>
-        <p:spPr>
-          <a:xfrm>
-            <a:off x="960120" y="1828800"/>
-            <a:ext cx="4754880" cy="457200"/>
-          </a:xfrm>
-          <a:prstGeom prst="rect">
-            <a:avLst/>
-          </a:prstGeom>
-          <a:noFill/>
-          <a:ln/>
-        </p:spPr>
-        <p:txBody>
-          <a:bodyPr wrap="square" lIns="0" tIns="0" rIns="0" bIns="0" rtlCol="0" anchor="ctr"/>
-          <a:lstStyle/>
-          <a:p>
-            <a:pPr indent="0" marL="0">
-              <a:buNone/>
-            </a:pPr>
-            <a:r>
-              <a:rPr lang="en-US" sz="1800" b="1" dirty="0">
-                <a:solidFill>
-                  <a:srgbClr val="2E7D5B"/>
-                </a:solidFill>
-                <a:latin typeface="Inter" pitchFamily="34" charset="0"/>
-                <a:ea typeface="Inter" pitchFamily="34" charset="-122"/>
-                <a:cs typeface="Inter" pitchFamily="34" charset="-120"/>
-              </a:rPr>
-              <a:t>THE VOICE PASS</a:t>
-            </a:r>
-            <a:endParaRPr lang="en-US" sz="1800" dirty="0"/>
-          </a:p>
-        </p:txBody>
-      </p:sp>
-      <p:sp>
-        <p:nvSpPr>
-          <p:cNvPr id="16" name="Text 13"/>
-          <p:cNvSpPr/>
-          <p:nvPr/>
-        </p:nvSpPr>
-        <p:spPr>
-          <a:xfrm>
-            <a:off x="960120" y="2377440"/>
-            <a:ext cx="4754880" cy="2651760"/>
-          </a:xfrm>
-          <a:prstGeom prst="rect">
-            <a:avLst/>
-          </a:prstGeom>
-          <a:noFill/>
-          <a:ln/>
-        </p:spPr>
-        <p:txBody>
-          <a:bodyPr wrap="square" lIns="0" tIns="0" rIns="0" bIns="0" rtlCol="0" anchor="t"/>
-          <a:lstStyle/>
-          <a:p>
-            <a:pPr indent="0" marL="0">
-              <a:buNone/>
-            </a:pPr>
-            <a:r>
-              <a:rPr lang="en-US" sz="1700" dirty="0">
-                <a:solidFill>
-                  <a:srgbClr val="1B1F24"/>
-                </a:solidFill>
-                <a:latin typeface="Inter" pitchFamily="34" charset="0"/>
-                <a:ea typeface="Inter" pitchFamily="34" charset="-122"/>
-                <a:cs typeface="Inter" pitchFamily="34" charset="-120"/>
-              </a:rPr>
-              <a:t>Read your draft ALOUD to your partner. If it doesn't sound like you, fix it: warmer, shorter, plainer, or retype the sentence the way you'd say it.</a:t>
-            </a:r>
-            <a:endParaRPr lang="en-US" sz="1700" dirty="0"/>
-          </a:p>
-        </p:txBody>
-      </p:sp>
-      <p:sp>
-        <p:nvSpPr>
           <p:cNvPr id="17" name="Shape 14"/>
           <p:cNvSpPr/>
           <p:nvPr/>
         </p:nvSpPr>
         <p:spPr>
           <a:xfrm>
-            <a:off x="6263640" y="1554480"/>
-            <a:ext cx="5394960" cy="3840480"/>
-          </a:xfrm>
-          <a:prstGeom prst="roundRect">
-            <a:avLst>
-              <a:gd name="adj" fmla="val 2143"/>
-            </a:avLst>
+            <a:off x="5184648" y="1536192"/>
+            <a:ext cx="146304" cy="146304"/>
+          </a:xfrm>
+          <a:prstGeom prst="ellipse">
+            <a:avLst/>
           </a:prstGeom>
           <a:solidFill>
-            <a:srgbClr val="F7F5F0"/>
+            <a:srgbClr val="E8837A"/>
           </a:solidFill>
           <a:ln w="12700">
             <a:solidFill>
-              <a:srgbClr val="F7F5F0"/>
+              <a:srgbClr val="E8837A"/>
             </a:solidFill>
             <a:prstDash val="solid"/>
           </a:ln>
@@ -12591,53 +12675,103 @@
       </p:sp>
       <p:sp>
         <p:nvSpPr>
-          <p:cNvPr id="18" name="Text 15"/>
-          <p:cNvSpPr/>
-          <p:nvPr/>
-        </p:nvSpPr>
-        <p:spPr>
-          <a:xfrm>
-            <a:off x="6583680" y="1828800"/>
-            <a:ext cx="4754880" cy="457200"/>
-          </a:xfrm>
-          <a:prstGeom prst="rect">
-            <a:avLst/>
-          </a:prstGeom>
-          <a:noFill/>
-          <a:ln/>
-        </p:spPr>
-        <p:txBody>
-          <a:bodyPr wrap="square" lIns="0" tIns="0" rIns="0" bIns="0" rtlCol="0" anchor="ctr"/>
-          <a:lstStyle/>
-          <a:p>
-            <a:pPr indent="0" marL="0">
-              <a:buNone/>
-            </a:pPr>
-            <a:r>
-              <a:rPr lang="en-US" sz="1800" b="1" dirty="0">
-                <a:solidFill>
-                  <a:srgbClr val="2A9D8F"/>
-                </a:solidFill>
-                <a:latin typeface="Inter" pitchFamily="34" charset="0"/>
-                <a:ea typeface="Inter" pitchFamily="34" charset="-122"/>
-                <a:cs typeface="Inter" pitchFamily="34" charset="-120"/>
-              </a:rPr>
-              <a:t>THE ACCESS PASS</a:t>
-            </a:r>
-            <a:endParaRPr lang="en-US" sz="1800" dirty="0"/>
-          </a:p>
-        </p:txBody>
-      </p:sp>
-      <p:sp>
-        <p:nvSpPr>
-          <p:cNvPr id="19" name="Text 16"/>
-          <p:cNvSpPr/>
-          <p:nvPr/>
-        </p:nvSpPr>
-        <p:spPr>
-          <a:xfrm>
-            <a:off x="6583680" y="2377440"/>
-            <a:ext cx="4754880" cy="2651760"/>
+          <p:cNvPr id="18" name="Shape 15"/>
+          <p:cNvSpPr/>
+          <p:nvPr/>
+        </p:nvSpPr>
+        <p:spPr>
+          <a:xfrm>
+            <a:off x="5431536" y="1536192"/>
+            <a:ext cx="146304" cy="146304"/>
+          </a:xfrm>
+          <a:prstGeom prst="ellipse">
+            <a:avLst/>
+          </a:prstGeom>
+          <a:solidFill>
+            <a:srgbClr val="F4A825"/>
+          </a:solidFill>
+          <a:ln w="12700">
+            <a:solidFill>
+              <a:srgbClr val="F4A825"/>
+            </a:solidFill>
+            <a:prstDash val="solid"/>
+          </a:ln>
+        </p:spPr>
+      </p:sp>
+      <p:sp>
+        <p:nvSpPr>
+          <p:cNvPr id="19" name="Shape 16"/>
+          <p:cNvSpPr/>
+          <p:nvPr/>
+        </p:nvSpPr>
+        <p:spPr>
+          <a:xfrm>
+            <a:off x="5678424" y="1536192"/>
+            <a:ext cx="146304" cy="146304"/>
+          </a:xfrm>
+          <a:prstGeom prst="ellipse">
+            <a:avLst/>
+          </a:prstGeom>
+          <a:solidFill>
+            <a:srgbClr val="2E7D5B"/>
+          </a:solidFill>
+          <a:ln w="12700">
+            <a:solidFill>
+              <a:srgbClr val="2E7D5B"/>
+            </a:solidFill>
+            <a:prstDash val="solid"/>
+          </a:ln>
+        </p:spPr>
+      </p:sp>
+      <p:sp>
+        <p:nvSpPr>
+          <p:cNvPr id="20" name="Text 17"/>
+          <p:cNvSpPr/>
+          <p:nvPr/>
+        </p:nvSpPr>
+        <p:spPr>
+          <a:xfrm>
+            <a:off x="6035040" y="1417320"/>
+            <a:ext cx="5440680" cy="384048"/>
+          </a:xfrm>
+          <a:prstGeom prst="rect">
+            <a:avLst/>
+          </a:prstGeom>
+          <a:noFill/>
+          <a:ln/>
+        </p:spPr>
+        <p:txBody>
+          <a:bodyPr wrap="square" lIns="0" tIns="0" rIns="0" bIns="0" rtlCol="0" anchor="ctr"/>
+          <a:lstStyle/>
+          <a:p>
+            <a:pPr indent="0" marL="0">
+              <a:buNone/>
+            </a:pPr>
+            <a:r>
+              <a:rPr lang="en-US" sz="1100" dirty="0">
+                <a:solidFill>
+                  <a:srgbClr val="9FB2C2"/>
+                </a:solidFill>
+                <a:latin typeface="Inter" pitchFamily="34" charset="0"/>
+                <a:ea typeface="Inter" pitchFamily="34" charset="-122"/>
+                <a:cs typeface="Inter" pitchFamily="34" charset="-120"/>
+              </a:rPr>
+              <a:t>Ms. Rivera's Friday newsletter · v2, after the voice pass</a:t>
+            </a:r>
+            <a:endParaRPr lang="en-US" sz="1100" dirty="0"/>
+          </a:p>
+        </p:txBody>
+      </p:sp>
+      <p:sp>
+        <p:nvSpPr>
+          <p:cNvPr id="21" name="Text 18"/>
+          <p:cNvSpPr/>
+          <p:nvPr/>
+        </p:nvSpPr>
+        <p:spPr>
+          <a:xfrm>
+            <a:off x="5303520" y="2011680"/>
+            <a:ext cx="5989320" cy="2743200"/>
           </a:xfrm>
           <a:prstGeom prst="rect">
             <a:avLst/>
@@ -12650,10 +12784,13 @@
           <a:lstStyle/>
           <a:p>
             <a:pPr indent="0" marL="0">
-              <a:buNone/>
-            </a:pPr>
-            <a:r>
-              <a:rPr lang="en-US" sz="1700" dirty="0">
+              <a:lnSpc>
+                <a:spcPct val="115000"/>
+              </a:lnSpc>
+              <a:buNone/>
+            </a:pPr>
+            <a:r>
+              <a:rPr lang="en-US" sz="1600" dirty="0">
                 <a:solidFill>
                   <a:srgbClr val="1B1F24"/>
                 </a:solidFill>
@@ -12661,48 +12798,48 @@
                 <a:ea typeface="Inter" pitchFamily="34" charset="-122"/>
                 <a:cs typeface="Inter" pitchFamily="34" charset="-120"/>
               </a:rPr>
-              <a:t>Skimmable? Plain words? Action item up top with a date? A message that fails the access pass fails the families who skim, and that's most of them.</a:t>
-            </a:r>
-            <a:endParaRPr lang="en-US" sz="1700" dirty="0"/>
-          </a:p>
-        </p:txBody>
-      </p:sp>
-      <p:sp>
-        <p:nvSpPr>
-          <p:cNvPr id="20" name="Text 17"/>
-          <p:cNvSpPr/>
-          <p:nvPr/>
-        </p:nvSpPr>
-        <p:spPr>
-          <a:xfrm>
-            <a:off x="640080" y="5623560"/>
-            <a:ext cx="10972800" cy="457200"/>
-          </a:xfrm>
-          <a:prstGeom prst="rect">
-            <a:avLst/>
-          </a:prstGeom>
-          <a:noFill/>
-          <a:ln/>
-        </p:spPr>
-        <p:txBody>
-          <a:bodyPr wrap="square" lIns="0" tIns="0" rIns="0" bIns="0" rtlCol="0" anchor="ctr"/>
-          <a:lstStyle/>
-          <a:p>
-            <a:pPr algn="ctr" indent="0" marL="0">
-              <a:buNone/>
-            </a:pPr>
-            <a:r>
-              <a:rPr lang="en-US" sz="1900" b="1" dirty="0">
-                <a:solidFill>
-                  <a:srgbClr val="13293D"/>
-                </a:solidFill>
-                <a:latin typeface="Inter" pitchFamily="34" charset="0"/>
-                <a:ea typeface="Inter" pitchFamily="34" charset="-122"/>
-                <a:cs typeface="Inter" pitchFamily="34" charset="-120"/>
-              </a:rPr>
-              <a:t>Both passes pass: the message is done, and it really goes out this week.</a:t>
-            </a:r>
-            <a:endParaRPr lang="en-US" sz="1900" dirty="0"/>
+              <a:t>"Hi families, happy Friday! We wrapped up fractions this week, and I was proud of how your kids stuck with the tricky parts. The science fair is Thursday at 6 in the gym, and picture day is Friday. The blue permission slip is due Wednesday. See you Thursday!"</a:t>
+            </a:r>
+            <a:endParaRPr lang="en-US" sz="1600" dirty="0"/>
+          </a:p>
+        </p:txBody>
+      </p:sp>
+      <p:sp>
+        <p:nvSpPr>
+          <p:cNvPr id="22" name="Text 19"/>
+          <p:cNvSpPr/>
+          <p:nvPr/>
+        </p:nvSpPr>
+        <p:spPr>
+          <a:xfrm>
+            <a:off x="5303520" y="5029200"/>
+            <a:ext cx="5989320" cy="685800"/>
+          </a:xfrm>
+          <a:prstGeom prst="rect">
+            <a:avLst/>
+          </a:prstGeom>
+          <a:noFill/>
+          <a:ln/>
+        </p:spPr>
+        <p:txBody>
+          <a:bodyPr wrap="square" lIns="0" tIns="0" rIns="0" bIns="0" rtlCol="0" anchor="t"/>
+          <a:lstStyle/>
+          <a:p>
+            <a:pPr indent="0" marL="0">
+              <a:buNone/>
+            </a:pPr>
+            <a:r>
+              <a:rPr lang="en-US" sz="1250" i="1" dirty="0">
+                <a:solidFill>
+                  <a:srgbClr val="5B6B7A"/>
+                </a:solidFill>
+                <a:latin typeface="Inter" pitchFamily="34" charset="0"/>
+                <a:ea typeface="Inter" pitchFamily="34" charset="-122"/>
+                <a:cs typeface="Inter" pitchFamily="34" charset="-120"/>
+              </a:rPr>
+              <a:t>"Demonstrated excellent growth" became her own sentence. One thing is still wrong: the slip is still buried.</a:t>
+            </a:r>
+            <a:endParaRPr lang="en-US" sz="1250" dirty="0"/>
           </a:p>
         </p:txBody>
       </p:sp>
@@ -13055,7 +13192,7 @@
                 <a:ea typeface="Inter" pitchFamily="34" charset="-122"/>
                 <a:cs typeface="Inter" pitchFamily="34" charset="-120"/>
               </a:rPr>
-              <a:t>Her batch, live: three improvement-focused notes, names added only in her own email.</a:t>
+              <a:t>Her newsletter, v3: the permission-slip nag rewritten warm, plain, and guilt-free.</a:t>
             </a:r>
             <a:endParaRPr lang="en-US" sz="1000" dirty="0"/>
           </a:p>
@@ -13094,7 +13231,7 @@
                 <a:ea typeface="Inter" pitchFamily="34" charset="-122"/>
                 <a:cs typeface="Inter" pitchFamily="34" charset="-120"/>
               </a:rPr>
-              <a:t>LAB · STEP 3 OF 4 · 5 MINUTES</a:t>
+              <a:t>LAB · STEP 3 OF 4 · 4 MINUTES · THE DEEP-PRACTICE STEP</a:t>
             </a:r>
             <a:endParaRPr lang="en-US" sz="1200" dirty="0"/>
           </a:p>
@@ -13109,7 +13246,7 @@
         <p:spPr>
           <a:xfrm>
             <a:off x="548640" y="384048"/>
-            <a:ext cx="11091672" cy="777240"/>
+            <a:ext cx="7955280" cy="777240"/>
           </a:xfrm>
           <a:prstGeom prst="rect">
             <a:avLst/>
@@ -13133,7 +13270,7 @@
                 <a:ea typeface="Inter" pitchFamily="34" charset="-122"/>
                 <a:cs typeface="Inter" pitchFamily="34" charset="-120"/>
               </a:rPr>
-              <a:t>Start the batch</a:t>
+              <a:t>The hard sentence</a:t>
             </a:r>
             <a:endParaRPr lang="en-US" sz="3200" dirty="0"/>
           </a:p>
@@ -13148,27 +13285,23 @@
         <p:spPr>
           <a:xfrm>
             <a:off x="640080" y="1371600"/>
-            <a:ext cx="10908792" cy="4297680"/>
-          </a:xfrm>
-          <a:prstGeom prst="rect">
-            <a:avLst/>
-          </a:prstGeom>
-          <a:noFill/>
-          <a:ln/>
-        </p:spPr>
-        <p:txBody>
-          <a:bodyPr wrap="square" rtlCol="0" anchor="t"/>
-          <a:lstStyle/>
-          <a:p>
-            <a:pPr marL="342900" indent="-342900">
-              <a:spcAft>
-                <a:spcPts val="1000"/>
-              </a:spcAft>
-              <a:buSzPct val="100000"/>
-              <a:buChar char="•"/>
-            </a:pPr>
-            <a:r>
-              <a:rPr lang="en-US" sz="2100" dirty="0">
+            <a:ext cx="10972800" cy="777240"/>
+          </a:xfrm>
+          <a:prstGeom prst="rect">
+            <a:avLst/>
+          </a:prstGeom>
+          <a:noFill/>
+          <a:ln/>
+        </p:spPr>
+        <p:txBody>
+          <a:bodyPr wrap="square" lIns="0" tIns="0" rIns="0" bIns="0" rtlCol="0" anchor="t"/>
+          <a:lstStyle/>
+          <a:p>
+            <a:pPr indent="0" marL="0">
+              <a:buNone/>
+            </a:pPr>
+            <a:r>
+              <a:rPr lang="en-US" sz="1650" dirty="0">
                 <a:solidFill>
                   <a:srgbClr val="1B1F24"/>
                 </a:solidFill>
@@ -13176,20 +13309,104 @@
                 <a:ea typeface="Inter" pitchFamily="34" charset="-122"/>
                 <a:cs typeface="Inter" pitchFamily="34" charset="-120"/>
               </a:rPr>
-              <a:t>Ask for one-sentence positive-note starters: warm, improvement-focused, by situation, no names</a:t>
-            </a:r>
-            <a:endParaRPr lang="en-US" sz="2100" dirty="0"/>
-          </a:p>
-          <a:p>
-            <a:pPr marL="342900" indent="-342900">
-              <a:spcAft>
-                <a:spcPts val="1000"/>
-              </a:spcAft>
-              <a:buSzPct val="100000"/>
-              <a:buChar char="•"/>
-            </a:pPr>
-            <a:r>
-              <a:rPr lang="en-US" sz="2100" dirty="0">
+              <a:t>Almost every real message carries one item you'd rather not write: the fee reminder, the missing slips, the nag. Rewrite yours warm, plain, and guilt-free, ending with exactly what to do and by when.</a:t>
+            </a:r>
+            <a:endParaRPr lang="en-US" sz="1650" dirty="0"/>
+          </a:p>
+        </p:txBody>
+      </p:sp>
+      <p:sp>
+        <p:nvSpPr>
+          <p:cNvPr id="15" name="Shape 12"/>
+          <p:cNvSpPr/>
+          <p:nvPr/>
+        </p:nvSpPr>
+        <p:spPr>
+          <a:xfrm>
+            <a:off x="640080" y="2286000"/>
+            <a:ext cx="10972800" cy="1371600"/>
+          </a:xfrm>
+          <a:prstGeom prst="roundRect">
+            <a:avLst>
+              <a:gd name="adj" fmla="val 6000"/>
+            </a:avLst>
+          </a:prstGeom>
+          <a:solidFill>
+            <a:srgbClr val="FBEFED"/>
+          </a:solidFill>
+          <a:ln w="12700">
+            <a:solidFill>
+              <a:srgbClr val="FBEFED"/>
+            </a:solidFill>
+            <a:prstDash val="solid"/>
+          </a:ln>
+        </p:spPr>
+      </p:sp>
+      <p:sp>
+        <p:nvSpPr>
+          <p:cNvPr id="16" name="Text 13"/>
+          <p:cNvSpPr/>
+          <p:nvPr/>
+        </p:nvSpPr>
+        <p:spPr>
+          <a:xfrm>
+            <a:off x="914400" y="2423160"/>
+            <a:ext cx="7315200" cy="292608"/>
+          </a:xfrm>
+          <a:prstGeom prst="rect">
+            <a:avLst/>
+          </a:prstGeom>
+          <a:noFill/>
+          <a:ln/>
+        </p:spPr>
+        <p:txBody>
+          <a:bodyPr wrap="square" lIns="0" tIns="0" rIns="0" bIns="0" rtlCol="0" anchor="ctr"/>
+          <a:lstStyle/>
+          <a:p>
+            <a:pPr indent="0" marL="0">
+              <a:buNone/>
+            </a:pPr>
+            <a:r>
+              <a:rPr lang="en-US" sz="1150" b="1" spc="150" kern="0" dirty="0">
+                <a:solidFill>
+                  <a:srgbClr val="B4453A"/>
+                </a:solidFill>
+                <a:latin typeface="Inter" pitchFamily="34" charset="0"/>
+                <a:ea typeface="Inter" pitchFamily="34" charset="-122"/>
+                <a:cs typeface="Inter" pitchFamily="34" charset="-120"/>
+              </a:rPr>
+              <a:t>HER HARD SENTENCE, BEFORE</a:t>
+            </a:r>
+            <a:endParaRPr lang="en-US" sz="1150" dirty="0"/>
+          </a:p>
+        </p:txBody>
+      </p:sp>
+      <p:sp>
+        <p:nvSpPr>
+          <p:cNvPr id="17" name="Text 14"/>
+          <p:cNvSpPr/>
+          <p:nvPr/>
+        </p:nvSpPr>
+        <p:spPr>
+          <a:xfrm>
+            <a:off x="914400" y="2743200"/>
+            <a:ext cx="10424160" cy="822960"/>
+          </a:xfrm>
+          <a:prstGeom prst="rect">
+            <a:avLst/>
+          </a:prstGeom>
+          <a:noFill/>
+          <a:ln/>
+        </p:spPr>
+        <p:txBody>
+          <a:bodyPr wrap="square" lIns="0" tIns="0" rIns="0" bIns="0" rtlCol="0" anchor="t"/>
+          <a:lstStyle/>
+          <a:p>
+            <a:pPr indent="0" marL="0">
+              <a:buNone/>
+            </a:pPr>
+            <a:r>
+              <a:rPr lang="en-US" sz="1650" i="1" dirty="0">
                 <a:solidFill>
                   <a:srgbClr val="1B1F24"/>
                 </a:solidFill>
@@ -13197,20 +13414,104 @@
                 <a:ea typeface="Inter" pitchFamily="34" charset="-122"/>
                 <a:cs typeface="Inter" pitchFamily="34" charset="-120"/>
               </a:rPr>
-              <a:t>Pick three; match each to a real student in your head</a:t>
-            </a:r>
-            <a:endParaRPr lang="en-US" sz="2100" dirty="0"/>
-          </a:p>
-          <a:p>
-            <a:pPr marL="342900" indent="-342900">
-              <a:spcAft>
-                <a:spcPts val="1000"/>
-              </a:spcAft>
-              <a:buSzPct val="100000"/>
-              <a:buChar char="•"/>
-            </a:pPr>
-            <a:r>
-              <a:rPr lang="en-US" sz="2100" dirty="0">
+              <a:t>"Please be advised that students without a signed permission slip will be unable to participate."</a:t>
+            </a:r>
+            <a:endParaRPr lang="en-US" sz="1650" dirty="0"/>
+          </a:p>
+        </p:txBody>
+      </p:sp>
+      <p:sp>
+        <p:nvSpPr>
+          <p:cNvPr id="18" name="Shape 15"/>
+          <p:cNvSpPr/>
+          <p:nvPr/>
+        </p:nvSpPr>
+        <p:spPr>
+          <a:xfrm>
+            <a:off x="640080" y="3840480"/>
+            <a:ext cx="10972800" cy="1600200"/>
+          </a:xfrm>
+          <a:prstGeom prst="roundRect">
+            <a:avLst>
+              <a:gd name="adj" fmla="val 5143"/>
+            </a:avLst>
+          </a:prstGeom>
+          <a:solidFill>
+            <a:srgbClr val="EAF5F3"/>
+          </a:solidFill>
+          <a:ln w="12700">
+            <a:solidFill>
+              <a:srgbClr val="EAF5F3"/>
+            </a:solidFill>
+            <a:prstDash val="solid"/>
+          </a:ln>
+        </p:spPr>
+      </p:sp>
+      <p:sp>
+        <p:nvSpPr>
+          <p:cNvPr id="19" name="Text 16"/>
+          <p:cNvSpPr/>
+          <p:nvPr/>
+        </p:nvSpPr>
+        <p:spPr>
+          <a:xfrm>
+            <a:off x="914400" y="3977640"/>
+            <a:ext cx="7315200" cy="292608"/>
+          </a:xfrm>
+          <a:prstGeom prst="rect">
+            <a:avLst/>
+          </a:prstGeom>
+          <a:noFill/>
+          <a:ln/>
+        </p:spPr>
+        <p:txBody>
+          <a:bodyPr wrap="square" lIns="0" tIns="0" rIns="0" bIns="0" rtlCol="0" anchor="ctr"/>
+          <a:lstStyle/>
+          <a:p>
+            <a:pPr indent="0" marL="0">
+              <a:buNone/>
+            </a:pPr>
+            <a:r>
+              <a:rPr lang="en-US" sz="1150" b="1" spc="150" kern="0" dirty="0">
+                <a:solidFill>
+                  <a:srgbClr val="2E7D5B"/>
+                </a:solidFill>
+                <a:latin typeface="Inter" pitchFamily="34" charset="0"/>
+                <a:ea typeface="Inter" pitchFamily="34" charset="-122"/>
+                <a:cs typeface="Inter" pitchFamily="34" charset="-120"/>
+              </a:rPr>
+              <a:t>AFTER THE REPAIR</a:t>
+            </a:r>
+            <a:endParaRPr lang="en-US" sz="1150" dirty="0"/>
+          </a:p>
+        </p:txBody>
+      </p:sp>
+      <p:sp>
+        <p:nvSpPr>
+          <p:cNvPr id="20" name="Text 17"/>
+          <p:cNvSpPr/>
+          <p:nvPr/>
+        </p:nvSpPr>
+        <p:spPr>
+          <a:xfrm>
+            <a:off x="914400" y="4297680"/>
+            <a:ext cx="10424160" cy="1051560"/>
+          </a:xfrm>
+          <a:prstGeom prst="rect">
+            <a:avLst/>
+          </a:prstGeom>
+          <a:noFill/>
+          <a:ln/>
+        </p:spPr>
+        <p:txBody>
+          <a:bodyPr wrap="square" lIns="0" tIns="0" rIns="0" bIns="0" rtlCol="0" anchor="t"/>
+          <a:lstStyle/>
+          <a:p>
+            <a:pPr indent="0" marL="0">
+              <a:buNone/>
+            </a:pPr>
+            <a:r>
+              <a:rPr lang="en-US" sz="1650" i="1" dirty="0">
                 <a:solidFill>
                   <a:srgbClr val="1B1F24"/>
                 </a:solidFill>
@@ -13218,30 +13519,48 @@
                 <a:ea typeface="Inter" pitchFamily="34" charset="-122"/>
                 <a:cs typeface="Inter" pitchFamily="34" charset="-120"/>
               </a:rPr>
-              <a:t>Personalize later today in your own email, where names belong</a:t>
-            </a:r>
-            <a:endParaRPr lang="en-US" sz="2100" dirty="0"/>
-          </a:p>
-          <a:p>
-            <a:pPr marL="342900" indent="-342900">
-              <a:spcAft>
-                <a:spcPts val="1000"/>
-              </a:spcAft>
-              <a:buSzPct val="100000"/>
-              <a:buChar char="•"/>
-            </a:pPr>
-            <a:r>
-              <a:rPr lang="en-US" sz="2100" b="1" dirty="0">
-                <a:solidFill>
-                  <a:srgbClr val="1B1F24"/>
-                </a:solidFill>
-                <a:latin typeface="Inter" pitchFamily="34" charset="0"/>
-                <a:ea typeface="Inter" pitchFamily="34" charset="-122"/>
-                <a:cs typeface="Inter" pitchFamily="34" charset="-120"/>
-              </a:rPr>
-              <a:t>Three families get the sentence the research says matters. Cost: five minutes.</a:t>
-            </a:r>
-            <a:endParaRPr lang="en-US" sz="2100" dirty="0"/>
+              <a:t>"If the blue slip hasn't made it home yet, no worries: it happens. Send it back by Wednesday so nobody misses out. Need a fresh copy? Just reply."</a:t>
+            </a:r>
+            <a:endParaRPr lang="en-US" sz="1650" dirty="0"/>
+          </a:p>
+        </p:txBody>
+      </p:sp>
+      <p:sp>
+        <p:nvSpPr>
+          <p:cNvPr id="21" name="Text 18"/>
+          <p:cNvSpPr/>
+          <p:nvPr/>
+        </p:nvSpPr>
+        <p:spPr>
+          <a:xfrm>
+            <a:off x="640080" y="5623560"/>
+            <a:ext cx="10972800" cy="457200"/>
+          </a:xfrm>
+          <a:prstGeom prst="rect">
+            <a:avLst/>
+          </a:prstGeom>
+          <a:noFill/>
+          <a:ln/>
+        </p:spPr>
+        <p:txBody>
+          <a:bodyPr wrap="square" lIns="0" tIns="0" rIns="0" bIns="0" rtlCol="0" anchor="ctr"/>
+          <a:lstStyle/>
+          <a:p>
+            <a:pPr algn="ctr" indent="0" marL="0">
+              <a:buNone/>
+            </a:pPr>
+            <a:r>
+              <a:rPr lang="en-US" sz="1800" b="1" dirty="0">
+                <a:solidFill>
+                  <a:srgbClr val="13293D"/>
+                </a:solidFill>
+                <a:latin typeface="Inter" pitchFamily="34" charset="0"/>
+                <a:ea typeface="Inter" pitchFamily="34" charset="-122"/>
+                <a:cs typeface="Inter" pitchFamily="34" charset="-120"/>
+              </a:rPr>
+              <a:t>Same requirement, zero sting; the deadline still does its job.</a:t>
+            </a:r>
+            <a:endParaRPr lang="en-US" sz="1800" dirty="0"/>
           </a:p>
         </p:txBody>
       </p:sp>
@@ -13594,7 +13913,7 @@
                 <a:ea typeface="Inter" pitchFamily="34" charset="-122"/>
                 <a:cs typeface="Inter" pitchFamily="34" charset="-120"/>
               </a:rPr>
-              <a:t>Her access plan: which languages, which channel, who gives the human check.</a:t>
+              <a:t>Her newsletter, final: action items on top, under 150 words, scheduled for Friday at 3:00.</a:t>
             </a:r>
             <a:endParaRPr lang="en-US" sz="1000" dirty="0"/>
           </a:p>
@@ -13633,7 +13952,7 @@
                 <a:ea typeface="Inter" pitchFamily="34" charset="-122"/>
                 <a:cs typeface="Inter" pitchFamily="34" charset="-120"/>
               </a:rPr>
-              <a:t>LAB · STEP 4 OF 4 · 3 MINUTES · ALONE, QUIET</a:t>
+              <a:t>LAB · STEP 4 OF 4 · 4 MINUTES</a:t>
             </a:r>
             <a:endParaRPr lang="en-US" sz="1200" dirty="0"/>
           </a:p>
@@ -13648,7 +13967,7 @@
         <p:spPr>
           <a:xfrm>
             <a:off x="548640" y="384048"/>
-            <a:ext cx="11091672" cy="777240"/>
+            <a:ext cx="7955280" cy="777240"/>
           </a:xfrm>
           <a:prstGeom prst="rect">
             <a:avLst/>
@@ -13672,7 +13991,7 @@
                 <a:ea typeface="Inter" pitchFamily="34" charset="-122"/>
                 <a:cs typeface="Inter" pitchFamily="34" charset="-120"/>
               </a:rPr>
-              <a:t>Write your access plan</a:t>
+              <a:t>The access pass &amp; sign-off</a:t>
             </a:r>
             <a:endParaRPr lang="en-US" sz="3200" dirty="0"/>
           </a:p>
@@ -13680,26 +13999,156 @@
       </p:sp>
       <p:sp>
         <p:nvSpPr>
-          <p:cNvPr id="14" name="Shape 11"/>
-          <p:cNvSpPr/>
-          <p:nvPr/>
-        </p:nvSpPr>
-        <p:spPr>
-          <a:xfrm>
-            <a:off x="640080" y="1554480"/>
-            <a:ext cx="10972800" cy="3017520"/>
+          <p:cNvPr id="14" name="Text 11"/>
+          <p:cNvSpPr/>
+          <p:nvPr/>
+        </p:nvSpPr>
+        <p:spPr>
+          <a:xfrm>
+            <a:off x="640080" y="1417320"/>
+            <a:ext cx="4114800" cy="4206240"/>
+          </a:xfrm>
+          <a:prstGeom prst="rect">
+            <a:avLst/>
+          </a:prstGeom>
+          <a:noFill/>
+          <a:ln/>
+        </p:spPr>
+        <p:txBody>
+          <a:bodyPr wrap="square" rtlCol="0" anchor="t"/>
+          <a:lstStyle/>
+          <a:p>
+            <a:pPr marL="342900" indent="-342900">
+              <a:spcAft>
+                <a:spcPts val="1000"/>
+              </a:spcAft>
+              <a:buSzPct val="100000"/>
+              <a:buChar char="•"/>
+            </a:pPr>
+            <a:r>
+              <a:rPr lang="en-US" sz="1700" dirty="0">
+                <a:solidFill>
+                  <a:srgbClr val="1B1F24"/>
+                </a:solidFill>
+                <a:latin typeface="Inter" pitchFamily="34" charset="0"/>
+                <a:ea typeface="Inter" pitchFamily="34" charset="-122"/>
+                <a:cs typeface="Inter" pitchFamily="34" charset="-120"/>
+              </a:rPr>
+              <a:t>Action items to the top: short list, with dates</a:t>
+            </a:r>
+            <a:endParaRPr lang="en-US" sz="1700" dirty="0"/>
+          </a:p>
+          <a:p>
+            <a:pPr marL="342900" indent="-342900">
+              <a:spcAft>
+                <a:spcPts val="1000"/>
+              </a:spcAft>
+              <a:buSzPct val="100000"/>
+              <a:buChar char="•"/>
+            </a:pPr>
+            <a:r>
+              <a:rPr lang="en-US" sz="1700" dirty="0">
+                <a:solidFill>
+                  <a:srgbClr val="1B1F24"/>
+                </a:solidFill>
+                <a:latin typeface="Inter" pitchFamily="34" charset="0"/>
+                <a:ea typeface="Inter" pitchFamily="34" charset="-122"/>
+                <a:cs typeface="Inter" pitchFamily="34" charset="-120"/>
+              </a:rPr>
+              <a:t>Plain words, under about 150</a:t>
+            </a:r>
+            <a:endParaRPr lang="en-US" sz="1700" dirty="0"/>
+          </a:p>
+          <a:p>
+            <a:pPr marL="342900" indent="-342900">
+              <a:spcAft>
+                <a:spcPts val="1000"/>
+              </a:spcAft>
+              <a:buSzPct val="100000"/>
+              <a:buChar char="•"/>
+            </a:pPr>
+            <a:r>
+              <a:rPr lang="en-US" sz="1700" dirty="0">
+                <a:solidFill>
+                  <a:srgbClr val="1B1F24"/>
+                </a:solidFill>
+                <a:latin typeface="Inter" pitchFamily="34" charset="0"/>
+                <a:ea typeface="Inter" pitchFamily="34" charset="-122"/>
+                <a:cs typeface="Inter" pitchFamily="34" charset="-120"/>
+              </a:rPr>
+              <a:t>Swap: your partner reads it as a tired parent on a phone at 9 p.m.</a:t>
+            </a:r>
+            <a:endParaRPr lang="en-US" sz="1700" dirty="0"/>
+          </a:p>
+          <a:p>
+            <a:pPr marL="342900" indent="-342900">
+              <a:buSzPct val="100000"/>
+              <a:buChar char="•"/>
+            </a:pPr>
+            <a:r>
+              <a:rPr lang="en-US" sz="1700" b="1" dirty="0">
+                <a:solidFill>
+                  <a:srgbClr val="1B1F24"/>
+                </a:solidFill>
+                <a:latin typeface="Inter" pitchFamily="34" charset="0"/>
+                <a:ea typeface="Inter" pitchFamily="34" charset="-122"/>
+                <a:cs typeface="Inter" pitchFamily="34" charset="-120"/>
+              </a:rPr>
+              <a:t>Clean? Schedule the send: pick the day and time now.</a:t>
+            </a:r>
+            <a:endParaRPr lang="en-US" sz="1700" dirty="0"/>
+          </a:p>
+        </p:txBody>
+      </p:sp>
+      <p:sp>
+        <p:nvSpPr>
+          <p:cNvPr id="15" name="Shape 12"/>
+          <p:cNvSpPr/>
+          <p:nvPr/>
+        </p:nvSpPr>
+        <p:spPr>
+          <a:xfrm>
+            <a:off x="4983480" y="1417320"/>
+            <a:ext cx="6629400" cy="4434840"/>
           </a:xfrm>
           <a:prstGeom prst="roundRect">
             <a:avLst>
-              <a:gd name="adj" fmla="val 2727"/>
+              <a:gd name="adj" fmla="val 2062"/>
             </a:avLst>
           </a:prstGeom>
           <a:solidFill>
-            <a:srgbClr val="F7F5F0"/>
+            <a:srgbClr val="FFFFFF"/>
+          </a:solidFill>
+          <a:ln w="19050">
+            <a:solidFill>
+              <a:srgbClr val="DCE3EA"/>
+            </a:solidFill>
+            <a:prstDash val="solid"/>
+          </a:ln>
+        </p:spPr>
+      </p:sp>
+      <p:sp>
+        <p:nvSpPr>
+          <p:cNvPr id="16" name="Shape 13"/>
+          <p:cNvSpPr/>
+          <p:nvPr/>
+        </p:nvSpPr>
+        <p:spPr>
+          <a:xfrm>
+            <a:off x="4983480" y="1417320"/>
+            <a:ext cx="6629400" cy="384048"/>
+          </a:xfrm>
+          <a:prstGeom prst="roundRect">
+            <a:avLst>
+              <a:gd name="adj" fmla="val 23810"/>
+            </a:avLst>
+          </a:prstGeom>
+          <a:solidFill>
+            <a:srgbClr val="13293D"/>
           </a:solidFill>
           <a:ln w="12700">
             <a:solidFill>
-              <a:srgbClr val="F7F5F0"/>
+              <a:srgbClr val="13293D"/>
             </a:solidFill>
             <a:prstDash val="solid"/>
           </a:ln>
@@ -13707,50 +14156,165 @@
       </p:sp>
       <p:sp>
         <p:nvSpPr>
-          <p:cNvPr id="15" name="Text 12"/>
-          <p:cNvSpPr/>
-          <p:nvPr/>
-        </p:nvSpPr>
-        <p:spPr>
-          <a:xfrm>
-            <a:off x="960120" y="1828800"/>
-            <a:ext cx="10332720" cy="2468880"/>
-          </a:xfrm>
-          <a:prstGeom prst="rect">
-            <a:avLst/>
-          </a:prstGeom>
-          <a:noFill/>
-          <a:ln/>
-        </p:spPr>
-        <p:txBody>
-          <a:bodyPr wrap="square" lIns="0" tIns="0" rIns="0" bIns="0" rtlCol="0" anchor="ctr"/>
+          <p:cNvPr id="17" name="Shape 14"/>
+          <p:cNvSpPr/>
+          <p:nvPr/>
+        </p:nvSpPr>
+        <p:spPr>
+          <a:xfrm>
+            <a:off x="5184648" y="1536192"/>
+            <a:ext cx="146304" cy="146304"/>
+          </a:xfrm>
+          <a:prstGeom prst="ellipse">
+            <a:avLst/>
+          </a:prstGeom>
+          <a:solidFill>
+            <a:srgbClr val="E8837A"/>
+          </a:solidFill>
+          <a:ln w="12700">
+            <a:solidFill>
+              <a:srgbClr val="E8837A"/>
+            </a:solidFill>
+            <a:prstDash val="solid"/>
+          </a:ln>
+        </p:spPr>
+      </p:sp>
+      <p:sp>
+        <p:nvSpPr>
+          <p:cNvPr id="18" name="Shape 15"/>
+          <p:cNvSpPr/>
+          <p:nvPr/>
+        </p:nvSpPr>
+        <p:spPr>
+          <a:xfrm>
+            <a:off x="5431536" y="1536192"/>
+            <a:ext cx="146304" cy="146304"/>
+          </a:xfrm>
+          <a:prstGeom prst="ellipse">
+            <a:avLst/>
+          </a:prstGeom>
+          <a:solidFill>
+            <a:srgbClr val="F4A825"/>
+          </a:solidFill>
+          <a:ln w="12700">
+            <a:solidFill>
+              <a:srgbClr val="F4A825"/>
+            </a:solidFill>
+            <a:prstDash val="solid"/>
+          </a:ln>
+        </p:spPr>
+      </p:sp>
+      <p:sp>
+        <p:nvSpPr>
+          <p:cNvPr id="19" name="Shape 16"/>
+          <p:cNvSpPr/>
+          <p:nvPr/>
+        </p:nvSpPr>
+        <p:spPr>
+          <a:xfrm>
+            <a:off x="5678424" y="1536192"/>
+            <a:ext cx="146304" cy="146304"/>
+          </a:xfrm>
+          <a:prstGeom prst="ellipse">
+            <a:avLst/>
+          </a:prstGeom>
+          <a:solidFill>
+            <a:srgbClr val="2E7D5B"/>
+          </a:solidFill>
+          <a:ln w="12700">
+            <a:solidFill>
+              <a:srgbClr val="2E7D5B"/>
+            </a:solidFill>
+            <a:prstDash val="solid"/>
+          </a:ln>
+        </p:spPr>
+      </p:sp>
+      <p:sp>
+        <p:nvSpPr>
+          <p:cNvPr id="20" name="Text 17"/>
+          <p:cNvSpPr/>
+          <p:nvPr/>
+        </p:nvSpPr>
+        <p:spPr>
+          <a:xfrm>
+            <a:off x="6035040" y="1417320"/>
+            <a:ext cx="5440680" cy="384048"/>
+          </a:xfrm>
+          <a:prstGeom prst="rect">
+            <a:avLst/>
+          </a:prstGeom>
+          <a:noFill/>
+          <a:ln/>
+        </p:spPr>
+        <p:txBody>
+          <a:bodyPr wrap="square" lIns="0" tIns="0" rIns="0" bIns="0" rtlCol="0" anchor="ctr"/>
+          <a:lstStyle/>
+          <a:p>
+            <a:pPr indent="0" marL="0">
+              <a:buNone/>
+            </a:pPr>
+            <a:r>
+              <a:rPr lang="en-US" sz="1100" dirty="0">
+                <a:solidFill>
+                  <a:srgbClr val="9FB2C2"/>
+                </a:solidFill>
+                <a:latin typeface="Inter" pitchFamily="34" charset="0"/>
+                <a:ea typeface="Inter" pitchFamily="34" charset="-122"/>
+                <a:cs typeface="Inter" pitchFamily="34" charset="-120"/>
+              </a:rPr>
+              <a:t>Ms. Rivera's Friday newsletter · final, scheduled for Friday at 3:00</a:t>
+            </a:r>
+            <a:endParaRPr lang="en-US" sz="1100" dirty="0"/>
+          </a:p>
+        </p:txBody>
+      </p:sp>
+      <p:sp>
+        <p:nvSpPr>
+          <p:cNvPr id="21" name="Text 18"/>
+          <p:cNvSpPr/>
+          <p:nvPr/>
+        </p:nvSpPr>
+        <p:spPr>
+          <a:xfrm>
+            <a:off x="5303520" y="1965960"/>
+            <a:ext cx="5989320" cy="3063240"/>
+          </a:xfrm>
+          <a:prstGeom prst="rect">
+            <a:avLst/>
+          </a:prstGeom>
+          <a:noFill/>
+          <a:ln/>
+        </p:spPr>
+        <p:txBody>
+          <a:bodyPr wrap="square" lIns="0" tIns="0" rIns="0" bIns="0" rtlCol="0" anchor="t"/>
           <a:lstStyle/>
           <a:p>
             <a:pPr indent="0" marL="0">
               <a:lnSpc>
-                <a:spcPct val="135000"/>
+                <a:spcPct val="112000"/>
               </a:lnSpc>
               <a:buNone/>
             </a:pPr>
             <a:r>
-              <a:rPr lang="en-US" sz="1900" b="1" dirty="0">
-                <a:solidFill>
-                  <a:srgbClr val="13293D"/>
-                </a:solidFill>
-                <a:latin typeface="Inter" pitchFamily="34" charset="0"/>
-                <a:ea typeface="Inter" pitchFamily="34" charset="-122"/>
-                <a:cs typeface="Inter" pitchFamily="34" charset="-120"/>
-              </a:rPr>
-              <a:t>Line 1: </a:t>
+              <a:rPr lang="en-US" sz="1600" dirty="0">
+                <a:solidFill>
+                  <a:srgbClr val="1B1F24"/>
+                </a:solidFill>
+                <a:latin typeface="Inter" pitchFamily="34" charset="0"/>
+                <a:ea typeface="Inter" pitchFamily="34" charset="-122"/>
+                <a:cs typeface="Inter" pitchFamily="34" charset="-120"/>
+              </a:rPr>
+              <a:t>"Hi families, happy Friday! Three quick things:
+</a:t>
             </a:r>
             <a:pPr indent="0" marL="0">
               <a:lnSpc>
-                <a:spcPct val="135000"/>
+                <a:spcPct val="112000"/>
               </a:lnSpc>
               <a:buNone/>
             </a:pPr>
             <a:r>
-              <a:rPr lang="en-US" sz="1900" dirty="0">
+              <a:rPr lang="en-US" sz="1600" b="1" dirty="0">
                 <a:solidFill>
                   <a:srgbClr val="1B1F24"/>
                 </a:solidFill>
@@ -13758,34 +14322,19 @@
                 <a:ea typeface="Inter" pitchFamily="34" charset="-122"/>
                 <a:cs typeface="Inter" pitchFamily="34" charset="-120"/>
               </a:rPr>
-              <a:t>Which languages do my families read? (If unknown: finding out is this week's step.)
+              <a:t>• Blue permission slip: back by Wednesday (need a copy? just reply)
+• Science fair: Thursday, 6:00, in the gym
+• Picture day: Friday
 </a:t>
             </a:r>
             <a:pPr indent="0" marL="0">
               <a:lnSpc>
-                <a:spcPct val="135000"/>
+                <a:spcPct val="112000"/>
               </a:lnSpc>
               <a:buNone/>
             </a:pPr>
             <a:r>
-              <a:rPr lang="en-US" sz="1900" b="1" dirty="0">
-                <a:solidFill>
-                  <a:srgbClr val="13293D"/>
-                </a:solidFill>
-                <a:latin typeface="Inter" pitchFamily="34" charset="0"/>
-                <a:ea typeface="Inter" pitchFamily="34" charset="-122"/>
-                <a:cs typeface="Inter" pitchFamily="34" charset="-120"/>
-              </a:rPr>
-              <a:t>Line 2: </a:t>
-            </a:r>
-            <a:pPr indent="0" marL="0">
-              <a:lnSpc>
-                <a:spcPct val="135000"/>
-              </a:lnSpc>
-              <a:buNone/>
-            </a:pPr>
-            <a:r>
-              <a:rPr lang="en-US" sz="1900" dirty="0">
+              <a:rPr lang="en-US" sz="1600" dirty="0">
                 <a:solidFill>
                   <a:srgbClr val="1B1F24"/>
                 </a:solidFill>
@@ -13793,83 +14342,48 @@
                 <a:ea typeface="Inter" pitchFamily="34" charset="-122"/>
                 <a:cs typeface="Inter" pitchFamily="34" charset="-120"/>
               </a:rPr>
-              <a:t>Official documents travel via: [your district's translation channel]
-</a:t>
-            </a:r>
-            <a:pPr indent="0" marL="0">
-              <a:lnSpc>
-                <a:spcPct val="135000"/>
-              </a:lnSpc>
-              <a:buNone/>
-            </a:pPr>
-            <a:r>
-              <a:rPr lang="en-US" sz="1900" b="1" dirty="0">
-                <a:solidFill>
-                  <a:srgbClr val="13293D"/>
-                </a:solidFill>
-                <a:latin typeface="Inter" pitchFamily="34" charset="0"/>
-                <a:ea typeface="Inter" pitchFamily="34" charset="-122"/>
-                <a:cs typeface="Inter" pitchFamily="34" charset="-120"/>
-              </a:rPr>
-              <a:t>Line 3: </a:t>
-            </a:r>
-            <a:pPr indent="0" marL="0">
-              <a:lnSpc>
-                <a:spcPct val="135000"/>
-              </a:lnSpc>
-              <a:buNone/>
-            </a:pPr>
-            <a:r>
-              <a:rPr lang="en-US" sz="1900" dirty="0">
-                <a:solidFill>
-                  <a:srgbClr val="1B1F24"/>
-                </a:solidFill>
-                <a:latin typeface="Inter" pitchFamily="34" charset="0"/>
-                <a:ea typeface="Inter" pitchFamily="34" charset="-122"/>
-                <a:cs typeface="Inter" pitchFamily="34" charset="-120"/>
-              </a:rPr>
-              <a:t>My human check for translated messages: [bilingual colleague, aide, or liaison]</a:t>
-            </a:r>
-            <a:endParaRPr lang="en-US" sz="1900" dirty="0"/>
-          </a:p>
-        </p:txBody>
-      </p:sp>
-      <p:sp>
-        <p:nvSpPr>
-          <p:cNvPr id="16" name="Text 13"/>
-          <p:cNvSpPr/>
-          <p:nvPr/>
-        </p:nvSpPr>
-        <p:spPr>
-          <a:xfrm>
-            <a:off x="640080" y="4937760"/>
-            <a:ext cx="10972800" cy="502920"/>
-          </a:xfrm>
-          <a:prstGeom prst="rect">
-            <a:avLst/>
-          </a:prstGeom>
-          <a:noFill/>
-          <a:ln/>
-        </p:spPr>
-        <p:txBody>
-          <a:bodyPr wrap="square" lIns="0" tIns="0" rIns="0" bIns="0" rtlCol="0" anchor="ctr"/>
-          <a:lstStyle/>
-          <a:p>
-            <a:pPr algn="ctr" indent="0" marL="0">
-              <a:buNone/>
-            </a:pPr>
-            <a:r>
-              <a:rPr lang="en-US" sz="2000" b="1" dirty="0">
-                <a:solidFill>
-                  <a:srgbClr val="13293D"/>
-                </a:solidFill>
-                <a:latin typeface="Inter" pitchFamily="34" charset="0"/>
-                <a:ea typeface="Inter" pitchFamily="34" charset="-122"/>
-                <a:cs typeface="Inter" pitchFamily="34" charset="-120"/>
-              </a:rPr>
-              <a:t>Three lines, and families who never could read your messages start to.</a:t>
-            </a:r>
-            <a:endParaRPr lang="en-US" sz="2000" dirty="0"/>
+              <a:t>We wrapped up fractions this week, and I was proud of how your kids stuck with the tricky parts. See you Thursday!"</a:t>
+            </a:r>
+            <a:endParaRPr lang="en-US" sz="1600" dirty="0"/>
+          </a:p>
+        </p:txBody>
+      </p:sp>
+      <p:sp>
+        <p:nvSpPr>
+          <p:cNvPr id="22" name="Text 19"/>
+          <p:cNvSpPr/>
+          <p:nvPr/>
+        </p:nvSpPr>
+        <p:spPr>
+          <a:xfrm>
+            <a:off x="5303520" y="5120640"/>
+            <a:ext cx="5989320" cy="594360"/>
+          </a:xfrm>
+          <a:prstGeom prst="rect">
+            <a:avLst/>
+          </a:prstGeom>
+          <a:noFill/>
+          <a:ln/>
+        </p:spPr>
+        <p:txBody>
+          <a:bodyPr wrap="square" lIns="0" tIns="0" rIns="0" bIns="0" rtlCol="0" anchor="t"/>
+          <a:lstStyle/>
+          <a:p>
+            <a:pPr indent="0" marL="0">
+              <a:buNone/>
+            </a:pPr>
+            <a:r>
+              <a:rPr lang="en-US" sz="1250" i="1" dirty="0">
+                <a:solidFill>
+                  <a:srgbClr val="5B6B7A"/>
+                </a:solidFill>
+                <a:latin typeface="Inter" pitchFamily="34" charset="0"/>
+                <a:ea typeface="Inter" pitchFamily="34" charset="-122"/>
+                <a:cs typeface="Inter" pitchFamily="34" charset="-120"/>
+              </a:rPr>
+              <a:t>Action items on top, under 150 words, sounds like her. Done means it sends.</a:t>
+            </a:r>
+            <a:endParaRPr lang="en-US" sz="1250" dirty="0"/>
           </a:p>
         </p:txBody>
       </p:sp>
@@ -14222,7 +14736,7 @@
                 <a:ea typeface="Inter" pitchFamily="34" charset="-122"/>
                 <a:cs typeface="Inter" pitchFamily="34" charset="-120"/>
               </a:rPr>
-              <a:t>Her share-out: the before and after, read aloud.</a:t>
+              <a:t>Her share-out: v1's opening read against the final. Same facts; now it's her.</a:t>
             </a:r>
             <a:endParaRPr lang="en-US" sz="1000" dirty="0"/>
           </a:p>
@@ -14276,7 +14790,7 @@
         <p:spPr>
           <a:xfrm>
             <a:off x="548640" y="384048"/>
-            <a:ext cx="11091672" cy="777240"/>
+            <a:ext cx="7955280" cy="777240"/>
           </a:xfrm>
           <a:prstGeom prst="rect">
             <a:avLst/>
@@ -14300,7 +14814,7 @@
                 <a:ea typeface="Inter" pitchFamily="34" charset="-122"/>
                 <a:cs typeface="Inter" pitchFamily="34" charset="-120"/>
               </a:rPr>
-              <a:t>Read us a before and after</a:t>
+              <a:t>Read us your before and after</a:t>
             </a:r>
             <a:endParaRPr lang="en-US" sz="3200" dirty="0"/>
           </a:p>
@@ -14314,8 +14828,8 @@
         </p:nvSpPr>
         <p:spPr>
           <a:xfrm>
-            <a:off x="640080" y="1371600"/>
-            <a:ext cx="10908792" cy="4297680"/>
+            <a:off x="640080" y="1417320"/>
+            <a:ext cx="10972800" cy="2011680"/>
           </a:xfrm>
           <a:prstGeom prst="rect">
             <a:avLst/>
@@ -14335,7 +14849,7 @@
               <a:buChar char="•"/>
             </a:pPr>
             <a:r>
-              <a:rPr lang="en-US" sz="2100" dirty="0">
+              <a:rPr lang="en-US" sz="1900" dirty="0">
                 <a:solidFill>
                   <a:srgbClr val="1B1F24"/>
                 </a:solidFill>
@@ -14343,9 +14857,9 @@
                 <a:ea typeface="Inter" pitchFamily="34" charset="-122"/>
                 <a:cs typeface="Inter" pitchFamily="34" charset="-120"/>
               </a:rPr>
-              <a:t>Your message's before and after, read aloud, or your favorite note starter</a:t>
-            </a:r>
-            <a:endParaRPr lang="en-US" sz="2100" dirty="0"/>
+              <a:t>Your first draft, read against the version you just scheduled</a:t>
+            </a:r>
+            <a:endParaRPr lang="en-US" sz="1900" dirty="0"/>
           </a:p>
           <a:p>
             <a:pPr marL="342900" indent="-342900">
@@ -14356,7 +14870,7 @@
               <a:buChar char="•"/>
             </a:pPr>
             <a:r>
-              <a:rPr lang="en-US" sz="2100" dirty="0">
+              <a:rPr lang="en-US" sz="1900" dirty="0">
                 <a:solidFill>
                   <a:srgbClr val="1B1F24"/>
                 </a:solidFill>
@@ -14366,18 +14880,15 @@
               </a:rPr>
               <a:t>Listen for how different the voices sound</a:t>
             </a:r>
-            <a:endParaRPr lang="en-US" sz="2100" dirty="0"/>
+            <a:endParaRPr lang="en-US" sz="1900" dirty="0"/>
           </a:p>
           <a:p>
             <a:pPr marL="342900" indent="-342900">
-              <a:spcAft>
-                <a:spcPts val="1000"/>
-              </a:spcAft>
               <a:buSzPct val="100000"/>
               <a:buChar char="•"/>
             </a:pPr>
             <a:r>
-              <a:rPr lang="en-US" sz="2100" b="1" dirty="0">
+              <a:rPr lang="en-US" sz="1900" b="1" dirty="0">
                 <a:solidFill>
                   <a:srgbClr val="1B1F24"/>
                 </a:solidFill>
@@ -14387,7 +14898,217 @@
               </a:rPr>
               <a:t>Same tool, thirty teachers, thirty recognizable humans. That's the point.</a:t>
             </a:r>
-            <a:endParaRPr lang="en-US" sz="2100" dirty="0"/>
+            <a:endParaRPr lang="en-US" sz="1900" dirty="0"/>
+          </a:p>
+        </p:txBody>
+      </p:sp>
+      <p:sp>
+        <p:nvSpPr>
+          <p:cNvPr id="15" name="Shape 12"/>
+          <p:cNvSpPr/>
+          <p:nvPr/>
+        </p:nvSpPr>
+        <p:spPr>
+          <a:xfrm>
+            <a:off x="640080" y="3611880"/>
+            <a:ext cx="5394960" cy="2103120"/>
+          </a:xfrm>
+          <a:prstGeom prst="roundRect">
+            <a:avLst>
+              <a:gd name="adj" fmla="val 3913"/>
+            </a:avLst>
+          </a:prstGeom>
+          <a:solidFill>
+            <a:srgbClr val="FBEFED"/>
+          </a:solidFill>
+          <a:ln w="12700">
+            <a:solidFill>
+              <a:srgbClr val="FBEFED"/>
+            </a:solidFill>
+            <a:prstDash val="solid"/>
+          </a:ln>
+        </p:spPr>
+      </p:sp>
+      <p:sp>
+        <p:nvSpPr>
+          <p:cNvPr id="16" name="Text 13"/>
+          <p:cNvSpPr/>
+          <p:nvPr/>
+        </p:nvSpPr>
+        <p:spPr>
+          <a:xfrm>
+            <a:off x="914400" y="3767328"/>
+            <a:ext cx="4846320" cy="292608"/>
+          </a:xfrm>
+          <a:prstGeom prst="rect">
+            <a:avLst/>
+          </a:prstGeom>
+          <a:noFill/>
+          <a:ln/>
+        </p:spPr>
+        <p:txBody>
+          <a:bodyPr wrap="square" lIns="0" tIns="0" rIns="0" bIns="0" rtlCol="0" anchor="ctr"/>
+          <a:lstStyle/>
+          <a:p>
+            <a:pPr indent="0" marL="0">
+              <a:buNone/>
+            </a:pPr>
+            <a:r>
+              <a:rPr lang="en-US" sz="1150" b="1" spc="150" kern="0" dirty="0">
+                <a:solidFill>
+                  <a:srgbClr val="B4453A"/>
+                </a:solidFill>
+                <a:latin typeface="Inter" pitchFamily="34" charset="0"/>
+                <a:ea typeface="Inter" pitchFamily="34" charset="-122"/>
+                <a:cs typeface="Inter" pitchFamily="34" charset="-120"/>
+              </a:rPr>
+              <a:t>MS. RIVERA'S BEFORE</a:t>
+            </a:r>
+            <a:endParaRPr lang="en-US" sz="1150" dirty="0"/>
+          </a:p>
+        </p:txBody>
+      </p:sp>
+      <p:sp>
+        <p:nvSpPr>
+          <p:cNvPr id="17" name="Text 14"/>
+          <p:cNvSpPr/>
+          <p:nvPr/>
+        </p:nvSpPr>
+        <p:spPr>
+          <a:xfrm>
+            <a:off x="914400" y="4096512"/>
+            <a:ext cx="4846320" cy="1508760"/>
+          </a:xfrm>
+          <a:prstGeom prst="rect">
+            <a:avLst/>
+          </a:prstGeom>
+          <a:noFill/>
+          <a:ln/>
+        </p:spPr>
+        <p:txBody>
+          <a:bodyPr wrap="square" lIns="0" tIns="0" rIns="0" bIns="0" rtlCol="0" anchor="t"/>
+          <a:lstStyle/>
+          <a:p>
+            <a:pPr indent="0" marL="0">
+              <a:buNone/>
+            </a:pPr>
+            <a:r>
+              <a:rPr lang="en-US" sz="1600" i="1" dirty="0">
+                <a:solidFill>
+                  <a:srgbClr val="1B1F24"/>
+                </a:solidFill>
+                <a:latin typeface="Inter" pitchFamily="34" charset="0"/>
+                <a:ea typeface="Inter" pitchFamily="34" charset="-122"/>
+                <a:cs typeface="Inter" pitchFamily="34" charset="-120"/>
+              </a:rPr>
+              <a:t>"Hello families! We had a wonderful week concluding our fractions unit. The students demonstrated excellent growth."</a:t>
+            </a:r>
+            <a:endParaRPr lang="en-US" sz="1600" dirty="0"/>
+          </a:p>
+        </p:txBody>
+      </p:sp>
+      <p:sp>
+        <p:nvSpPr>
+          <p:cNvPr id="18" name="Shape 15"/>
+          <p:cNvSpPr/>
+          <p:nvPr/>
+        </p:nvSpPr>
+        <p:spPr>
+          <a:xfrm>
+            <a:off x="6263640" y="3611880"/>
+            <a:ext cx="5394960" cy="2103120"/>
+          </a:xfrm>
+          <a:prstGeom prst="roundRect">
+            <a:avLst>
+              <a:gd name="adj" fmla="val 3913"/>
+            </a:avLst>
+          </a:prstGeom>
+          <a:solidFill>
+            <a:srgbClr val="EAF5F3"/>
+          </a:solidFill>
+          <a:ln w="12700">
+            <a:solidFill>
+              <a:srgbClr val="EAF5F3"/>
+            </a:solidFill>
+            <a:prstDash val="solid"/>
+          </a:ln>
+        </p:spPr>
+      </p:sp>
+      <p:sp>
+        <p:nvSpPr>
+          <p:cNvPr id="19" name="Text 16"/>
+          <p:cNvSpPr/>
+          <p:nvPr/>
+        </p:nvSpPr>
+        <p:spPr>
+          <a:xfrm>
+            <a:off x="6537960" y="3767328"/>
+            <a:ext cx="4846320" cy="292608"/>
+          </a:xfrm>
+          <a:prstGeom prst="rect">
+            <a:avLst/>
+          </a:prstGeom>
+          <a:noFill/>
+          <a:ln/>
+        </p:spPr>
+        <p:txBody>
+          <a:bodyPr wrap="square" lIns="0" tIns="0" rIns="0" bIns="0" rtlCol="0" anchor="ctr"/>
+          <a:lstStyle/>
+          <a:p>
+            <a:pPr indent="0" marL="0">
+              <a:buNone/>
+            </a:pPr>
+            <a:r>
+              <a:rPr lang="en-US" sz="1150" b="1" spc="150" kern="0" dirty="0">
+                <a:solidFill>
+                  <a:srgbClr val="2E7D5B"/>
+                </a:solidFill>
+                <a:latin typeface="Inter" pitchFamily="34" charset="0"/>
+                <a:ea typeface="Inter" pitchFamily="34" charset="-122"/>
+                <a:cs typeface="Inter" pitchFamily="34" charset="-120"/>
+              </a:rPr>
+              <a:t>MS. RIVERA'S AFTER</a:t>
+            </a:r>
+            <a:endParaRPr lang="en-US" sz="1150" dirty="0"/>
+          </a:p>
+        </p:txBody>
+      </p:sp>
+      <p:sp>
+        <p:nvSpPr>
+          <p:cNvPr id="20" name="Text 17"/>
+          <p:cNvSpPr/>
+          <p:nvPr/>
+        </p:nvSpPr>
+        <p:spPr>
+          <a:xfrm>
+            <a:off x="6537960" y="4096512"/>
+            <a:ext cx="4846320" cy="1508760"/>
+          </a:xfrm>
+          <a:prstGeom prst="rect">
+            <a:avLst/>
+          </a:prstGeom>
+          <a:noFill/>
+          <a:ln/>
+        </p:spPr>
+        <p:txBody>
+          <a:bodyPr wrap="square" lIns="0" tIns="0" rIns="0" bIns="0" rtlCol="0" anchor="t"/>
+          <a:lstStyle/>
+          <a:p>
+            <a:pPr indent="0" marL="0">
+              <a:buNone/>
+            </a:pPr>
+            <a:r>
+              <a:rPr lang="en-US" sz="1600" i="1" dirty="0">
+                <a:solidFill>
+                  <a:srgbClr val="1B1F24"/>
+                </a:solidFill>
+                <a:latin typeface="Inter" pitchFamily="34" charset="0"/>
+                <a:ea typeface="Inter" pitchFamily="34" charset="-122"/>
+                <a:cs typeface="Inter" pitchFamily="34" charset="-120"/>
+              </a:rPr>
+              <a:t>"Hi families, happy Friday! Three quick things: the slip, the science fair, picture day. And I was proud of your kids this week."</a:t>
+            </a:r>
+            <a:endParaRPr lang="en-US" sz="1600" dirty="0"/>
           </a:p>
         </p:txBody>
       </p:sp>
@@ -14740,7 +15461,7 @@
                 <a:ea typeface="Inter" pitchFamily="34" charset="-122"/>
                 <a:cs typeface="Inter" pitchFamily="34" charset="-120"/>
               </a:rPr>
-              <a:t>Her inventory: message ready, batch started, translation plan written.</a:t>
+              <a:t>Her inventory: newsletter scheduled; batch prompt queued; 24-hour rule armed.</a:t>
             </a:r>
             <a:endParaRPr lang="en-US" sz="1000" dirty="0"/>
           </a:p>
@@ -14779,7 +15500,7 @@
                 <a:ea typeface="Inter" pitchFamily="34" charset="-122"/>
                 <a:cs typeface="Inter" pitchFamily="34" charset="-120"/>
               </a:rPr>
-              <a:t>TWENTY-ONE MINUTES OF WORK, ON THE RECORD</a:t>
+              <a:t>EIGHTEEN MINUTES OF WORK, ON THE RECORD</a:t>
             </a:r>
             <a:endParaRPr lang="en-US" sz="1200" dirty="0"/>
           </a:p>
@@ -14876,7 +15597,7 @@
               <a:buNone/>
             </a:pPr>
             <a:r>
-              <a:rPr lang="en-US" sz="2000" dirty="0">
+              <a:rPr lang="en-US" sz="1900" dirty="0">
                 <a:solidFill>
                   <a:srgbClr val="1B1F24"/>
                 </a:solidFill>
@@ -14884,14 +15605,14 @@
                 <a:ea typeface="Inter" pitchFamily="34" charset="-122"/>
                 <a:cs typeface="Inter" pitchFamily="34" charset="-120"/>
               </a:rPr>
-              <a:t>A real message to families, voiced and ready for this week. A positive-note batch with three families' sentences chosen. An access plan that starts reaching the families English-only messages missed.
+              <a:t>Next week's real message: drafted, voiced, the hard sentence repaired, action items on top, and scheduled to send. Plus two habits ready to start: the positive-note batch (the prompt is on the handout; its first run is Send 2 on the First 48 Hours sheet) and the 24-hour rule for anything written angry.
 </a:t>
             </a:r>
             <a:pPr indent="0" marL="0">
               <a:buNone/>
             </a:pPr>
             <a:r>
-              <a:rPr lang="en-US" sz="2000" b="1" dirty="0">
+              <a:rPr lang="en-US" sz="1900" b="1" dirty="0">
                 <a:solidFill>
                   <a:srgbClr val="13293D"/>
                 </a:solidFill>
@@ -14899,9 +15620,9 @@
                 <a:ea typeface="Inter" pitchFamily="34" charset="-122"/>
                 <a:cs typeface="Inter" pitchFamily="34" charset="-120"/>
               </a:rPr>
-              <a:t>That last one might matter most, and it took three minutes.</a:t>
-            </a:r>
-            <a:endParaRPr lang="en-US" sz="2000" dirty="0"/>
+              <a:t>One message, start to finish, and nothing about it was hypothetical.</a:t>
+            </a:r>
+            <a:endParaRPr lang="en-US" sz="1900" dirty="0"/>
           </a:p>
         </p:txBody>
       </p:sp>
@@ -15396,7 +16117,7 @@
                 <a:ea typeface="Inter" pitchFamily="34" charset="-122"/>
                 <a:cs typeface="Inter" pitchFamily="34" charset="-120"/>
               </a:rPr>
-              <a:t>Machine translation is helpful and imperfect; that's why the human check exists</a:t>
+              <a:t>It sounds fluent in every language, which is exactly why translation stays off your desk: fluent-sounding and faithful are different things, and you can't check the difference in a language you don't read</a:t>
             </a:r>
             <a:endParaRPr lang="en-US" sz="2100" dirty="0"/>
           </a:p>
@@ -16514,7 +17235,7 @@
                 <a:ea typeface="Inter" pitchFamily="34" charset="-122"/>
                 <a:cs typeface="Inter" pitchFamily="34" charset="-120"/>
               </a:rPr>
-              <a:t>Her month: batch habit, translation audit, comms templates in the staff doc.</a:t>
+              <a:t>Her month: batch habit, a makeover swap, comms templates in the staff doc.</a:t>
             </a:r>
             <a:endParaRPr lang="en-US" sz="1000" dirty="0"/>
           </a:p>
@@ -16670,7 +17391,7 @@
                 <a:ea typeface="Inter" pitchFamily="34" charset="-122"/>
                 <a:cs typeface="Inter" pitchFamily="34" charset="-120"/>
               </a:rPr>
-              <a:t>The lab message and three positive notes actually send</a:t>
+              <a:t>The lab message sends on schedule; the batch prompt gets its first run</a:t>
             </a:r>
             <a:endParaRPr lang="en-US" sz="1800" dirty="0"/>
           </a:p>
@@ -16826,7 +17547,7 @@
                 <a:ea typeface="Inter" pitchFamily="34" charset="-122"/>
                 <a:cs typeface="Inter" pitchFamily="34" charset="-120"/>
               </a:rPr>
-              <a:t>PLC · Translation Audit: every team knows its languages, channels, checks</a:t>
+              <a:t>PLC · Message Makeover Swap: bring the month's hardest message; repair it together</a:t>
             </a:r>
             <a:endParaRPr lang="en-US" sz="1800" dirty="0"/>
           </a:p>
@@ -17298,7 +18019,7 @@
                 <a:ea typeface="Inter" pitchFamily="34" charset="-122"/>
                 <a:cs typeface="Inter" pitchFamily="34" charset="-120"/>
               </a:rPr>
-              <a:t>Her 48 hours: send the message, send the batch, start the access plan.</a:t>
+              <a:t>Her 48 hours: the newsletter sends Friday; the batch runs Monday; the hard reply finally goes.</a:t>
             </a:r>
             <a:endParaRPr lang="en-US" sz="1000" dirty="0"/>
           </a:p>
@@ -17481,7 +18202,7 @@
                 <a:ea typeface="Inter" pitchFamily="34" charset="-122"/>
                 <a:cs typeface="Inter" pitchFamily="34" charset="-120"/>
               </a:rPr>
-              <a:t>Send the message you drafted</a:t>
+              <a:t>Let the message you scheduled send</a:t>
             </a:r>
             <a:endParaRPr lang="en-US" sz="1800" dirty="0"/>
           </a:p>
@@ -17520,7 +18241,7 @@
                 <a:ea typeface="Inter" pitchFamily="34" charset="-122"/>
                 <a:cs typeface="Inter" pitchFamily="34" charset="-120"/>
               </a:rPr>
-              <a:t>It passed both passes; it's done. Send it on schedule</a:t>
+              <a:t>It's drafted, voiced, and repaired; it's done. Let it go out on time</a:t>
             </a:r>
             <a:endParaRPr lang="en-US" sz="1450" dirty="0"/>
           </a:p>
@@ -17664,7 +18385,7 @@
                 <a:ea typeface="Inter" pitchFamily="34" charset="-122"/>
                 <a:cs typeface="Inter" pitchFamily="34" charset="-120"/>
               </a:rPr>
-              <a:t>Send three positive notes</a:t>
+              <a:t>Run the batch, send three notes</a:t>
             </a:r>
             <a:endParaRPr lang="en-US" sz="1800" dirty="0"/>
           </a:p>
@@ -17703,7 +18424,7 @@
                 <a:ea typeface="Inter" pitchFamily="34" charset="-122"/>
                 <a:cs typeface="Inter" pitchFamily="34" charset="-120"/>
               </a:rPr>
-              <a:t>Personalized in your own email, improvement-focused and warm</a:t>
+              <a:t>The handout prompt, three starters, personalized in your own email</a:t>
             </a:r>
             <a:endParaRPr lang="en-US" sz="1450" dirty="0"/>
           </a:p>
@@ -17847,7 +18568,7 @@
                 <a:ea typeface="Inter" pitchFamily="34" charset="-122"/>
                 <a:cs typeface="Inter" pitchFamily="34" charset="-120"/>
               </a:rPr>
-              <a:t>Start the access plan</a:t>
+              <a:t>Send the reply you've been sitting on</a:t>
             </a:r>
             <a:endParaRPr lang="en-US" sz="1800" dirty="0"/>
           </a:p>
@@ -17886,7 +18607,7 @@
                 <a:ea typeface="Inter" pitchFamily="34" charset="-122"/>
                 <a:cs typeface="Inter" pitchFamily="34" charset="-120"/>
               </a:rPr>
-              <a:t>Learn your roster's languages; send one translated message</a:t>
+              <a:t>The tool absorbs the heat (no names); the 24-hour rule sets the clock</a:t>
             </a:r>
             <a:endParaRPr lang="en-US" sz="1450" dirty="0"/>
           </a:p>
@@ -19041,7 +19762,7 @@
                 <a:ea typeface="Inter" pitchFamily="34" charset="-122"/>
                 <a:cs typeface="Inter" pitchFamily="34" charset="-120"/>
               </a:rPr>
-              <a:t>of credit-recovery students failed to earn course credit with no weekly message home. (Kraft &amp; Rogers, 2015)</a:t>
+              <a:t>of students in a summer program, all retaking a course they had failed, missed the credit again when no weekly message went home. (Kraft &amp; Rogers, 2015)</a:t>
             </a:r>
             <a:endParaRPr lang="en-US" sz="1600" dirty="0"/>
           </a:p>
@@ -19926,7 +20647,7 @@
                 <a:ea typeface="Inter" pitchFamily="34" charset="-122"/>
                 <a:cs typeface="Inter" pitchFamily="34" charset="-120"/>
               </a:rPr>
-              <a:t>Her goal: next week's real message drafted, a positive-note batch, a translation plan.</a:t>
+              <a:t>Her goal: next week's newsletter from blank page to scheduled send, and the batch habit started.</a:t>
             </a:r>
             <a:endParaRPr lang="en-US" sz="1000" dirty="0"/>
           </a:p>
@@ -20238,7 +20959,7 @@
                 <a:ea typeface="Inter" pitchFamily="34" charset="-122"/>
                 <a:cs typeface="Inter" pitchFamily="34" charset="-120"/>
               </a:rPr>
-              <a:t>Reaching every family: translation, tone, the human-only list</a:t>
+              <a:t>The tone-repair kit, and the lines that never move</a:t>
             </a:r>
             <a:endParaRPr lang="en-US" sz="2000" dirty="0"/>
           </a:p>
@@ -20277,7 +20998,7 @@
                 <a:ea typeface="Inter" pitchFamily="34" charset="-122"/>
                 <a:cs typeface="Inter" pitchFamily="34" charset="-120"/>
               </a:rPr>
-              <a:t>0:30</a:t>
+              <a:t>0:31</a:t>
             </a:r>
             <a:endParaRPr lang="en-US" sz="2000" dirty="0"/>
           </a:p>
@@ -20316,7 +21037,7 @@
                 <a:ea typeface="Inter" pitchFamily="34" charset="-122"/>
                 <a:cs typeface="Inter" pitchFamily="34" charset="-120"/>
               </a:rPr>
-              <a:t>Lab: real messages, really sent</a:t>
+              <a:t>Lab: one real message, blank page to scheduled send</a:t>
             </a:r>
             <a:endParaRPr lang="en-US" sz="2000" dirty="0"/>
           </a:p>
@@ -20355,7 +21076,7 @@
                 <a:ea typeface="Inter" pitchFamily="34" charset="-122"/>
                 <a:cs typeface="Inter" pitchFamily="34" charset="-120"/>
               </a:rPr>
-              <a:t>0:52</a:t>
+              <a:t>0:53</a:t>
             </a:r>
             <a:endParaRPr lang="en-US" sz="2000" dirty="0"/>
           </a:p>
@@ -20499,7 +21220,7 @@
                 <a:ea typeface="Inter" pitchFamily="34" charset="-122"/>
                 <a:cs typeface="Inter" pitchFamily="34" charset="-120"/>
               </a:rPr>
-              <a:t>You leave with next week's real message written and voiced, a positive-note batch started, and a translation plan for your roster.</a:t>
+              <a:t>You leave with next week's real message drafted, voiced, repaired, and scheduled to send, and the positive-note habit ready to start.</a:t>
             </a:r>
             <a:endParaRPr lang="en-US" sz="1350" dirty="0"/>
           </a:p>

--- a/kits/kit06/Kit06_PresentationDeck.pptx
+++ b/kits/kit06/Kit06_PresentationDeck.pptx
@@ -4076,7 +4076,7 @@
         <p:spPr>
           <a:xfrm>
             <a:off x="566928" y="128016"/>
-            <a:ext cx="11055096" cy="274320"/>
+            <a:ext cx="7955280" cy="274320"/>
           </a:xfrm>
           <a:prstGeom prst="rect">
             <a:avLst/>
@@ -4115,7 +4115,7 @@
         <p:spPr>
           <a:xfrm>
             <a:off x="548640" y="384048"/>
-            <a:ext cx="11091672" cy="777240"/>
+            <a:ext cx="7955280" cy="777240"/>
           </a:xfrm>
           <a:prstGeom prst="rect">
             <a:avLst/>
@@ -4758,7 +4758,7 @@
         <p:spPr>
           <a:xfrm>
             <a:off x="566928" y="128016"/>
-            <a:ext cx="11055096" cy="274320"/>
+            <a:ext cx="7955280" cy="274320"/>
           </a:xfrm>
           <a:prstGeom prst="rect">
             <a:avLst/>
@@ -4797,7 +4797,7 @@
         <p:spPr>
           <a:xfrm>
             <a:off x="548640" y="384048"/>
-            <a:ext cx="11091672" cy="777240"/>
+            <a:ext cx="7955280" cy="777240"/>
           </a:xfrm>
           <a:prstGeom prst="rect">
             <a:avLst/>
@@ -5647,7 +5647,7 @@
         <p:spPr>
           <a:xfrm>
             <a:off x="566928" y="128016"/>
-            <a:ext cx="11055096" cy="274320"/>
+            <a:ext cx="7955280" cy="274320"/>
           </a:xfrm>
           <a:prstGeom prst="rect">
             <a:avLst/>
@@ -6587,7 +6587,7 @@
         <p:spPr>
           <a:xfrm>
             <a:off x="566928" y="128016"/>
-            <a:ext cx="11055096" cy="274320"/>
+            <a:ext cx="7955280" cy="274320"/>
           </a:xfrm>
           <a:prstGeom prst="rect">
             <a:avLst/>
@@ -6626,7 +6626,7 @@
         <p:spPr>
           <a:xfrm>
             <a:off x="548640" y="384048"/>
-            <a:ext cx="11091672" cy="777240"/>
+            <a:ext cx="7955280" cy="777240"/>
           </a:xfrm>
           <a:prstGeom prst="rect">
             <a:avLst/>
@@ -7374,7 +7374,7 @@
         <p:spPr>
           <a:xfrm>
             <a:off x="566928" y="128016"/>
-            <a:ext cx="11055096" cy="274320"/>
+            <a:ext cx="7955280" cy="274320"/>
           </a:xfrm>
           <a:prstGeom prst="rect">
             <a:avLst/>
@@ -9624,7 +9624,7 @@
         <p:spPr>
           <a:xfrm>
             <a:off x="566928" y="128016"/>
-            <a:ext cx="11055096" cy="274320"/>
+            <a:ext cx="7955280" cy="274320"/>
           </a:xfrm>
           <a:prstGeom prst="rect">
             <a:avLst/>
@@ -9663,7 +9663,7 @@
         <p:spPr>
           <a:xfrm>
             <a:off x="548640" y="384048"/>
-            <a:ext cx="11091672" cy="777240"/>
+            <a:ext cx="7955280" cy="777240"/>
           </a:xfrm>
           <a:prstGeom prst="rect">
             <a:avLst/>
@@ -10919,7 +10919,7 @@
         <p:spPr>
           <a:xfrm>
             <a:off x="566928" y="128016"/>
-            <a:ext cx="11055096" cy="274320"/>
+            <a:ext cx="7955280" cy="274320"/>
           </a:xfrm>
           <a:prstGeom prst="rect">
             <a:avLst/>
@@ -11683,7 +11683,7 @@
         <p:spPr>
           <a:xfrm>
             <a:off x="566928" y="128016"/>
-            <a:ext cx="11055096" cy="274320"/>
+            <a:ext cx="7955280" cy="274320"/>
           </a:xfrm>
           <a:prstGeom prst="rect">
             <a:avLst/>
@@ -11722,7 +11722,7 @@
         <p:spPr>
           <a:xfrm>
             <a:off x="548640" y="384048"/>
-            <a:ext cx="11091672" cy="777240"/>
+            <a:ext cx="7955280" cy="777240"/>
           </a:xfrm>
           <a:prstGeom prst="rect">
             <a:avLst/>
@@ -12443,7 +12443,7 @@
         <p:spPr>
           <a:xfrm>
             <a:off x="566928" y="128016"/>
-            <a:ext cx="11055096" cy="274320"/>
+            <a:ext cx="7955280" cy="274320"/>
           </a:xfrm>
           <a:prstGeom prst="rect">
             <a:avLst/>
@@ -13207,7 +13207,7 @@
         <p:spPr>
           <a:xfrm>
             <a:off x="566928" y="128016"/>
-            <a:ext cx="11055096" cy="274320"/>
+            <a:ext cx="7955280" cy="274320"/>
           </a:xfrm>
           <a:prstGeom prst="rect">
             <a:avLst/>
@@ -13928,7 +13928,7 @@
         <p:spPr>
           <a:xfrm>
             <a:off x="566928" y="128016"/>
-            <a:ext cx="11055096" cy="274320"/>
+            <a:ext cx="7955280" cy="274320"/>
           </a:xfrm>
           <a:prstGeom prst="rect">
             <a:avLst/>
@@ -14751,7 +14751,7 @@
         <p:spPr>
           <a:xfrm>
             <a:off x="566928" y="128016"/>
-            <a:ext cx="11055096" cy="274320"/>
+            <a:ext cx="7955280" cy="274320"/>
           </a:xfrm>
           <a:prstGeom prst="rect">
             <a:avLst/>
@@ -15476,7 +15476,7 @@
         <p:spPr>
           <a:xfrm>
             <a:off x="566928" y="128016"/>
-            <a:ext cx="11055096" cy="274320"/>
+            <a:ext cx="7955280" cy="274320"/>
           </a:xfrm>
           <a:prstGeom prst="rect">
             <a:avLst/>
@@ -15515,7 +15515,7 @@
         <p:spPr>
           <a:xfrm>
             <a:off x="548640" y="384048"/>
-            <a:ext cx="11091672" cy="777240"/>
+            <a:ext cx="7955280" cy="777240"/>
           </a:xfrm>
           <a:prstGeom prst="rect">
             <a:avLst/>
@@ -15990,7 +15990,7 @@
         <p:spPr>
           <a:xfrm>
             <a:off x="566928" y="128016"/>
-            <a:ext cx="11055096" cy="274320"/>
+            <a:ext cx="7955280" cy="274320"/>
           </a:xfrm>
           <a:prstGeom prst="rect">
             <a:avLst/>
@@ -16029,7 +16029,7 @@
         <p:spPr>
           <a:xfrm>
             <a:off x="548640" y="384048"/>
-            <a:ext cx="11091672" cy="777240"/>
+            <a:ext cx="7955280" cy="777240"/>
           </a:xfrm>
           <a:prstGeom prst="rect">
             <a:avLst/>
@@ -17250,7 +17250,7 @@
         <p:spPr>
           <a:xfrm>
             <a:off x="566928" y="128016"/>
-            <a:ext cx="11055096" cy="274320"/>
+            <a:ext cx="7955280" cy="274320"/>
           </a:xfrm>
           <a:prstGeom prst="rect">
             <a:avLst/>
@@ -17289,7 +17289,7 @@
         <p:spPr>
           <a:xfrm>
             <a:off x="548640" y="384048"/>
-            <a:ext cx="11091672" cy="777240"/>
+            <a:ext cx="7955280" cy="777240"/>
           </a:xfrm>
           <a:prstGeom prst="rect">
             <a:avLst/>
@@ -18034,7 +18034,7 @@
         <p:spPr>
           <a:xfrm>
             <a:off x="566928" y="128016"/>
-            <a:ext cx="11055096" cy="274320"/>
+            <a:ext cx="7955280" cy="274320"/>
           </a:xfrm>
           <a:prstGeom prst="rect">
             <a:avLst/>
@@ -18073,7 +18073,7 @@
         <p:spPr>
           <a:xfrm>
             <a:off x="548640" y="384048"/>
-            <a:ext cx="11091672" cy="777240"/>
+            <a:ext cx="7955280" cy="777240"/>
           </a:xfrm>
           <a:prstGeom prst="rect">
             <a:avLst/>
@@ -19016,7 +19016,7 @@
         <p:spPr>
           <a:xfrm>
             <a:off x="566928" y="128016"/>
-            <a:ext cx="11055096" cy="274320"/>
+            <a:ext cx="7955280" cy="274320"/>
           </a:xfrm>
           <a:prstGeom prst="rect">
             <a:avLst/>
@@ -19055,7 +19055,7 @@
         <p:spPr>
           <a:xfrm>
             <a:off x="548640" y="384048"/>
-            <a:ext cx="11091672" cy="777240"/>
+            <a:ext cx="7955280" cy="777240"/>
           </a:xfrm>
           <a:prstGeom prst="rect">
             <a:avLst/>
@@ -19555,7 +19555,7 @@
         <p:spPr>
           <a:xfrm>
             <a:off x="566928" y="128016"/>
-            <a:ext cx="11055096" cy="274320"/>
+            <a:ext cx="7955280" cy="274320"/>
           </a:xfrm>
           <a:prstGeom prst="rect">
             <a:avLst/>
@@ -20662,7 +20662,7 @@
         <p:spPr>
           <a:xfrm>
             <a:off x="566928" y="128016"/>
-            <a:ext cx="11055096" cy="274320"/>
+            <a:ext cx="7955280" cy="274320"/>
           </a:xfrm>
           <a:prstGeom prst="rect">
             <a:avLst/>
@@ -20701,7 +20701,7 @@
         <p:spPr>
           <a:xfrm>
             <a:off x="548640" y="384048"/>
-            <a:ext cx="11091672" cy="777240"/>
+            <a:ext cx="7955280" cy="777240"/>
           </a:xfrm>
           <a:prstGeom prst="rect">
             <a:avLst/>
@@ -21590,7 +21590,7 @@
         <p:spPr>
           <a:xfrm>
             <a:off x="566928" y="128016"/>
-            <a:ext cx="11055096" cy="274320"/>
+            <a:ext cx="7955280" cy="274320"/>
           </a:xfrm>
           <a:prstGeom prst="rect">
             <a:avLst/>
@@ -21628,24 +21628,24 @@
         </p:nvSpPr>
         <p:spPr>
           <a:xfrm>
-            <a:off x="548640" y="384048"/>
-            <a:ext cx="11091672" cy="777240"/>
-          </a:xfrm>
-          <a:prstGeom prst="rect">
-            <a:avLst/>
-          </a:prstGeom>
-          <a:noFill/>
-          <a:ln/>
-        </p:spPr>
-        <p:txBody>
-          <a:bodyPr wrap="square" lIns="0" tIns="0" rIns="0" bIns="0" rtlCol="0" anchor="ctr"/>
-          <a:lstStyle/>
-          <a:p>
-            <a:pPr indent="0" marL="0">
-              <a:buNone/>
-            </a:pPr>
-            <a:r>
-              <a:rPr lang="en-US" sz="3200" b="1" dirty="0">
+            <a:off x="548640" y="457200"/>
+            <a:ext cx="7955280" cy="914400"/>
+          </a:xfrm>
+          <a:prstGeom prst="rect">
+            <a:avLst/>
+          </a:prstGeom>
+          <a:noFill/>
+          <a:ln/>
+        </p:spPr>
+        <p:txBody>
+          <a:bodyPr wrap="square" lIns="0" tIns="0" rIns="0" bIns="0" rtlCol="0" anchor="t"/>
+          <a:lstStyle/>
+          <a:p>
+            <a:pPr indent="0" marL="0">
+              <a:buNone/>
+            </a:pPr>
+            <a:r>
+              <a:rPr lang="en-US" sz="2800" b="1" dirty="0">
                 <a:solidFill>
                   <a:srgbClr val="13293D"/>
                 </a:solidFill>
@@ -21655,7 +21655,7 @@
               </a:rPr>
               <a:t>What it's genuinely good at here</a:t>
             </a:r>
-            <a:endParaRPr lang="en-US" sz="3200" dirty="0"/>
+            <a:endParaRPr lang="en-US" sz="2800" dirty="0"/>
           </a:p>
         </p:txBody>
       </p:sp>
@@ -22482,7 +22482,7 @@
         <p:spPr>
           <a:xfrm>
             <a:off x="566928" y="128016"/>
-            <a:ext cx="11055096" cy="274320"/>
+            <a:ext cx="7955280" cy="274320"/>
           </a:xfrm>
           <a:prstGeom prst="rect">
             <a:avLst/>
@@ -22521,7 +22521,7 @@
         <p:spPr>
           <a:xfrm>
             <a:off x="548640" y="384048"/>
-            <a:ext cx="11091672" cy="777240"/>
+            <a:ext cx="7955280" cy="777240"/>
           </a:xfrm>
           <a:prstGeom prst="rect">
             <a:avLst/>
@@ -23066,7 +23066,7 @@
         <p:spPr>
           <a:xfrm>
             <a:off x="566928" y="128016"/>
-            <a:ext cx="11055096" cy="274320"/>
+            <a:ext cx="7955280" cy="274320"/>
           </a:xfrm>
           <a:prstGeom prst="rect">
             <a:avLst/>
@@ -23105,7 +23105,7 @@
         <p:spPr>
           <a:xfrm>
             <a:off x="548640" y="384048"/>
-            <a:ext cx="11091672" cy="777240"/>
+            <a:ext cx="7955280" cy="777240"/>
           </a:xfrm>
           <a:prstGeom prst="rect">
             <a:avLst/>

--- a/kits/kit06/Kit06_PresentationDeck.pptx
+++ b/kits/kit06/Kit06_PresentationDeck.pptx
@@ -712,7 +712,7 @@
           <a:p>
             <a:r>
               <a:rPr lang="en-US" dirty="0"/>
-              <a:t>Say: this is Kraft &amp; Rogers turned into five minutes a week: improvement-focused, individualized, personalized by you. The personalizing step is not optional; it's the mechanism. The lab takes one message start to finish, so the batch is homework: the prompt is on the handout, and it's Send 2 on the First 48 Hours sheet.</a:t>
+              <a:t>Say: this is Kraft &amp; Rogers turned into five minutes a week: improvement-focused, individualized, personalized by you. Be precise if asked: the study tested a bundle, weekly individualized messages with improvement framing, and did not isolate personalization as the single active ingredient. Keep the personalizing step because it is part of what was tested, not because the research proved it is the one thing that works. The lab takes one message start to finish, so the batch is homework: the prompt is on the handout, and it's Send 2 on the First 48 Hours sheet.</a:t>
             </a:r>
             <a:endParaRPr lang="en-US" dirty="0"/>
           </a:p>
@@ -6153,7 +6153,7 @@
                 <a:ea typeface="Inter" pitchFamily="34" charset="-122"/>
                 <a:cs typeface="Inter" pitchFamily="34" charset="-120"/>
               </a:rPr>
-              <a:t>The tool made the blank page cheap. The sentence that lands is still yours: that's the mechanism the research measured.</a:t>
+              <a:t>The tool made the blank page cheap. The sentence that lands is still yours, and individualized messages are what the study actually tested.</a:t>
             </a:r>
             <a:endParaRPr lang="en-US" sz="1700" dirty="0"/>
           </a:p>
